--- a/doc/manual-ja.pptx
+++ b/doc/manual-ja.pptx
@@ -2,28 +2,29 @@
 <file path=ppt/presentation.xml><?xml version="1.0" encoding="utf-8"?>
 <p:presentation xmlns:p="http://schemas.openxmlformats.org/presentationml/2006/main">
   <p:sldMasterIdLst>
-    <p:sldMasterId xmlns:r="http://schemas.openxmlformats.org/officeDocument/2006/relationships" id="2147483648" r:id="R141618994edf492c"/>
+    <p:sldMasterId xmlns:r="http://schemas.openxmlformats.org/officeDocument/2006/relationships" id="2147483648" r:id="R48ee10eddd97413e"/>
   </p:sldMasterIdLst>
   <p:notesMasterIdLst>
-    <p:notesMasterId xmlns:r="http://schemas.openxmlformats.org/officeDocument/2006/relationships" r:id="Rba30ed2964cf4ad6"/>
+    <p:notesMasterId xmlns:r="http://schemas.openxmlformats.org/officeDocument/2006/relationships" r:id="Rcac3680fa8e34e0f"/>
   </p:notesMasterIdLst>
   <p:sldIdLst>
-    <p:sldId xmlns:r="http://schemas.openxmlformats.org/officeDocument/2006/relationships" id="256" r:id="Re013d6e495294138"/>
-    <p:sldId xmlns:r="http://schemas.openxmlformats.org/officeDocument/2006/relationships" id="257" r:id="R7758fa85f2e749dd"/>
-    <p:sldId xmlns:r="http://schemas.openxmlformats.org/officeDocument/2006/relationships" id="258" r:id="Ref386329c62e4ab4"/>
-    <p:sldId xmlns:r="http://schemas.openxmlformats.org/officeDocument/2006/relationships" id="259" r:id="R8877f387381f409e"/>
-    <p:sldId xmlns:r="http://schemas.openxmlformats.org/officeDocument/2006/relationships" id="260" r:id="R451a879094a74b39"/>
-    <p:sldId xmlns:r="http://schemas.openxmlformats.org/officeDocument/2006/relationships" id="261" r:id="R9bd6b915ba864d0a"/>
-    <p:sldId xmlns:r="http://schemas.openxmlformats.org/officeDocument/2006/relationships" id="262" r:id="Rebdbcdc897634ca4"/>
-    <p:sldId xmlns:r="http://schemas.openxmlformats.org/officeDocument/2006/relationships" id="263" r:id="Rbd37c74d90d24f6a"/>
-    <p:sldId xmlns:r="http://schemas.openxmlformats.org/officeDocument/2006/relationships" id="264" r:id="R94fbc6d0c7174e9a"/>
-    <p:sldId xmlns:r="http://schemas.openxmlformats.org/officeDocument/2006/relationships" id="265" r:id="R73609f0881264a3b"/>
-    <p:sldId xmlns:r="http://schemas.openxmlformats.org/officeDocument/2006/relationships" id="266" r:id="R97cd911b4ce24861"/>
-    <p:sldId xmlns:r="http://schemas.openxmlformats.org/officeDocument/2006/relationships" id="267" r:id="R2405b587d0b146cc"/>
-    <p:sldId xmlns:r="http://schemas.openxmlformats.org/officeDocument/2006/relationships" id="268" r:id="R4a22888f48e5404f"/>
-    <p:sldId xmlns:r="http://schemas.openxmlformats.org/officeDocument/2006/relationships" id="269" r:id="Rc9f5a8b800804d3d"/>
-    <p:sldId xmlns:r="http://schemas.openxmlformats.org/officeDocument/2006/relationships" id="270" r:id="R3bd3040875184e7c"/>
-    <p:sldId xmlns:r="http://schemas.openxmlformats.org/officeDocument/2006/relationships" id="271" r:id="Raf47d8993c504daf"/>
+    <p:sldId xmlns:r="http://schemas.openxmlformats.org/officeDocument/2006/relationships" id="256" r:id="R4331ef6d1dc74b14"/>
+    <p:sldId xmlns:r="http://schemas.openxmlformats.org/officeDocument/2006/relationships" id="257" r:id="Rbfa5c015a558420f"/>
+    <p:sldId xmlns:r="http://schemas.openxmlformats.org/officeDocument/2006/relationships" id="258" r:id="R43d58c86a7f846fd"/>
+    <p:sldId xmlns:r="http://schemas.openxmlformats.org/officeDocument/2006/relationships" id="259" r:id="R8a5846eabd8241d2"/>
+    <p:sldId xmlns:r="http://schemas.openxmlformats.org/officeDocument/2006/relationships" id="260" r:id="Ra6dedc8929784ae4"/>
+    <p:sldId xmlns:r="http://schemas.openxmlformats.org/officeDocument/2006/relationships" id="261" r:id="R5920597a4b854ea7"/>
+    <p:sldId xmlns:r="http://schemas.openxmlformats.org/officeDocument/2006/relationships" id="262" r:id="R0cb80598417f4356"/>
+    <p:sldId xmlns:r="http://schemas.openxmlformats.org/officeDocument/2006/relationships" id="263" r:id="Ra81278da143c4368"/>
+    <p:sldId xmlns:r="http://schemas.openxmlformats.org/officeDocument/2006/relationships" id="264" r:id="R736aacec548240b5"/>
+    <p:sldId xmlns:r="http://schemas.openxmlformats.org/officeDocument/2006/relationships" id="265" r:id="Re1ab55a74c9d4120"/>
+    <p:sldId xmlns:r="http://schemas.openxmlformats.org/officeDocument/2006/relationships" id="266" r:id="R74730cae4f884115"/>
+    <p:sldId xmlns:r="http://schemas.openxmlformats.org/officeDocument/2006/relationships" id="267" r:id="Rb0f1e38ad1e84937"/>
+    <p:sldId xmlns:r="http://schemas.openxmlformats.org/officeDocument/2006/relationships" id="268" r:id="R0ddd131360f9442f"/>
+    <p:sldId xmlns:r="http://schemas.openxmlformats.org/officeDocument/2006/relationships" id="269" r:id="R8c5bd682c607429f"/>
+    <p:sldId xmlns:r="http://schemas.openxmlformats.org/officeDocument/2006/relationships" id="270" r:id="Rea65c33546e9409b"/>
+    <p:sldId xmlns:r="http://schemas.openxmlformats.org/officeDocument/2006/relationships" id="271" r:id="Rf0bdee969c104f55"/>
+    <p:sldId xmlns:r="http://schemas.openxmlformats.org/officeDocument/2006/relationships" id="272" r:id="R2abd98d1ed294542"/>
   </p:sldIdLst>
   <p:sldSz cx="11430000" cy="8572500"/>
   <p:notesSz cx="6858000" cy="9144000"/>
@@ -945,6 +946,72 @@
 </p:notes>
 </file>
 
+<file path=ppt/notesSlides/notesSlide17.xml><?xml version="1.0" encoding="utf-8"?>
+<p:notes xmlns:p="http://schemas.openxmlformats.org/presentationml/2006/main">
+  <p:cSld>
+    <p:spTree>
+      <p:nvGrpSpPr>
+        <p:cNvPr id="1" name=""/>
+        <p:cNvGrpSpPr/>
+        <p:nvPr/>
+      </p:nvGrpSpPr>
+      <p:grpSpPr>
+        <a:xfrm xmlns:a="http://schemas.openxmlformats.org/drawingml/2006/main"/>
+      </p:grpSpPr>
+      <p:sp>
+        <p:nvSpPr>
+          <p:cNvPr id="2" name="Slide Image Placeholder 1"/>
+          <p:cNvSpPr>
+            <a:spLocks xmlns:a="http://schemas.openxmlformats.org/drawingml/2006/main" noGrp="1"/>
+          </p:cNvSpPr>
+          <p:nvPr>
+            <p:ph type="sldImg" idx="0"/>
+          </p:nvPr>
+        </p:nvSpPr>
+        <p:spPr/>
+      </p:sp>
+      <p:sp>
+        <p:nvSpPr>
+          <p:cNvPr id="3" name="Notes Placeholder 2"/>
+          <p:cNvSpPr>
+            <a:spLocks xmlns:a="http://schemas.openxmlformats.org/drawingml/2006/main" noGrp="1"/>
+          </p:cNvSpPr>
+          <p:nvPr>
+            <p:ph type="body" idx="1"/>
+          </p:nvPr>
+        </p:nvSpPr>
+        <p:spPr/>
+        <p:txBody>
+          <a:bodyPr xmlns:a="http://schemas.openxmlformats.org/drawingml/2006/main"/>
+          <a:lstStyle xmlns:a="http://schemas.openxmlformats.org/drawingml/2006/main"/>
+          <a:p xmlns:a="http://schemas.openxmlformats.org/drawingml/2006/main"/>
+        </p:txBody>
+      </p:sp>
+      <p:sp>
+        <p:nvSpPr>
+          <p:cNvPr id="4" name="Slide Number Placeholder 3"/>
+          <p:cNvSpPr>
+            <a:spLocks xmlns:a="http://schemas.openxmlformats.org/drawingml/2006/main" noGrp="1"/>
+          </p:cNvSpPr>
+          <p:nvPr>
+            <p:ph type="sldNum" idx="5"/>
+          </p:nvPr>
+        </p:nvSpPr>
+        <p:spPr/>
+        <p:txBody>
+          <a:bodyPr xmlns:a="http://schemas.openxmlformats.org/drawingml/2006/main"/>
+          <a:lstStyle xmlns:a="http://schemas.openxmlformats.org/drawingml/2006/main"/>
+          <a:p xmlns:a="http://schemas.openxmlformats.org/drawingml/2006/main"/>
+        </p:txBody>
+      </p:sp>
+    </p:spTree>
+  </p:cSld>
+  <p:clrMapOvr>
+    <a:masterClrMapping xmlns:a="http://schemas.openxmlformats.org/drawingml/2006/main"/>
+  </p:clrMapOvr>
+</p:notes>
+</file>
+
 <file path=ppt/notesSlides/notesSlide2.xml><?xml version="1.0" encoding="utf-8"?>
 <p:notes xmlns:p="http://schemas.openxmlformats.org/presentationml/2006/main">
   <p:cSld>
@@ -1511,7 +1578,7 @@
   </p:cSld>
   <p:clrMap bg1="lt1" tx1="dk1" bg2="lt2" tx2="dk2" accent1="accent1" accent2="accent2" accent3="accent3" accent4="accent4" accent5="accent5" accent6="accent6" hlink="hlink" folHlink="folHlink"/>
   <p:sldLayoutIdLst>
-    <p:sldLayoutId xmlns:r="http://schemas.openxmlformats.org/officeDocument/2006/relationships" id="2147483649" r:id="R43391674d4114f6b"/>
+    <p:sldLayoutId xmlns:r="http://schemas.openxmlformats.org/officeDocument/2006/relationships" id="2147483649" r:id="Ra6ea0adddd59476c"/>
   </p:sldLayoutIdLst>
   <p:txStyles>
     <p:titleStyle>
@@ -3172,7 +3239,7 @@
                   <a:srgbClr val="F3FBFF"/>
                 </a:solidFill>
               </a:rPr>
-              <a:t>接触は事故ではない。逆転の武器になる</a:t>
+              <a:t>接触と追走が、逆転の武器になる</a:t>
             </a:r>
           </a:p>
         </p:txBody>
@@ -4084,7 +4151,7 @@
                   <a:srgbClr val="F3FBFF"/>
                 </a:solidFill>
               </a:rPr>
-              <a:t>差が開くと後続車のBOOSTが徐々に回復する。自動加速ではないため、使う場所はドライバーが決める。</a:t>
+              <a:t>近距離では同じレーンを約0.5秒追走するとBOOST回復。大差時は距離連動回復。どちらも自動加速ではない。</a:t>
             </a:r>
           </a:p>
         </p:txBody>
@@ -4332,6 +4399,89 @@
                 </a:solidFill>
               </a:rPr>
               <a:t>X68000 / 3 LAPS / 2 CARS</a:t>
+            </a:r>
+          </a:p>
+        </p:txBody>
+      </p:sp>
+      <p:sp>
+        <p:nvSpPr>
+          <p:cNvPr id="37" name="slip-label-cover">
+            <a:extLst xmlns:a="http://schemas.openxmlformats.org/drawingml/2006/main">
+              <a:ext uri="{FF2B5EF4-FFF2-40B4-BE49-F238E27FC236}">
+                <a16:creationId xmlns:a16="http://schemas.microsoft.com/office/drawing/2014/main" id="{98A72BF5-F931-4DC8-AC61-C795D71D3778}"/>
+              </a:ext>
+            </a:extLst>
+          </p:cNvPr>
+          <p:cNvSpPr>
+            <a:spLocks xmlns:a="http://schemas.openxmlformats.org/drawingml/2006/main" noGrp="1"/>
+          </p:cNvSpPr>
+          <p:nvPr/>
+        </p:nvSpPr>
+        <p:spPr>
+          <a:xfrm xmlns:a="http://schemas.openxmlformats.org/drawingml/2006/main">
+            <a:off x="6000750" y="1885950"/>
+            <a:ext cx="4476750" cy="685800"/>
+          </a:xfrm>
+          <a:prstGeom xmlns:a="http://schemas.openxmlformats.org/drawingml/2006/main" prst="rect">
+            <a:avLst/>
+          </a:prstGeom>
+          <a:solidFill xmlns:a="http://schemas.openxmlformats.org/drawingml/2006/main">
+            <a:srgbClr val="05070A"/>
+          </a:solidFill>
+          <a:ln xmlns:a="http://schemas.openxmlformats.org/drawingml/2006/main" w="0">
+            <a:solidFill>
+              <a:srgbClr val="05070A"/>
+            </a:solidFill>
+            <a:prstDash val="solid"/>
+          </a:ln>
+        </p:spPr>
+      </p:sp>
+      <p:sp>
+        <p:nvSpPr>
+          <p:cNvPr id="38" name="slip-label">
+            <a:extLst xmlns:a="http://schemas.openxmlformats.org/drawingml/2006/main">
+              <a:ext uri="{FF2B5EF4-FFF2-40B4-BE49-F238E27FC236}">
+                <a16:creationId xmlns:a16="http://schemas.microsoft.com/office/drawing/2014/main" id="{EA90B79F-113B-4FDE-A902-B071B48FDF52}"/>
+              </a:ext>
+            </a:extLst>
+          </p:cNvPr>
+          <p:cNvSpPr>
+            <a:spLocks xmlns:a="http://schemas.openxmlformats.org/drawingml/2006/main" noGrp="1"/>
+          </p:cNvSpPr>
+          <p:nvPr/>
+        </p:nvSpPr>
+        <p:spPr>
+          <a:xfrm xmlns:a="http://schemas.openxmlformats.org/drawingml/2006/main">
+            <a:off x="6172200" y="1943100"/>
+            <a:ext cx="4095750" cy="514350"/>
+          </a:xfrm>
+          <a:prstGeom xmlns:a="http://schemas.openxmlformats.org/drawingml/2006/main" prst="rect">
+            <a:avLst/>
+          </a:prstGeom>
+          <a:noFill xmlns:a="http://schemas.openxmlformats.org/drawingml/2006/main"/>
+          <a:ln xmlns:a="http://schemas.openxmlformats.org/drawingml/2006/main" w="0">
+            <a:noFill/>
+            <a:prstDash val="solid"/>
+          </a:ln>
+        </p:spPr>
+        <p:txBody>
+          <a:bodyPr xmlns:a="http://schemas.openxmlformats.org/drawingml/2006/main" anchor="ctr"/>
+          <a:lstStyle xmlns:a="http://schemas.openxmlformats.org/drawingml/2006/main"/>
+          <a:p xmlns:a="http://schemas.openxmlformats.org/drawingml/2006/main">
+            <a:pPr algn="l">
+              <a:defRPr sz="1725" b="1">
+                <a:solidFill>
+                  <a:srgbClr val="00E6E6"/>
+                </a:solidFill>
+              </a:defRPr>
+            </a:pPr>
+            <a:r>
+              <a:rPr sz="1725" b="1">
+                <a:solidFill>
+                  <a:srgbClr val="00E6E6"/>
+                </a:solidFill>
+              </a:rPr>
+              <a:t>SLIPSTREAM + CATCH-UP</a:t>
             </a:r>
           </a:p>
         </p:txBody>
@@ -10819,6 +10969,1370 @@
 <file path=ppt/slides/slide16.xml><?xml version="1.0" encoding="utf-8"?>
 <p:sld xmlns:p="http://schemas.openxmlformats.org/presentationml/2006/main">
   <p:cSld>
+    <p:spTree>
+      <p:nvGrpSpPr>
+        <p:cNvPr id="1" name=""/>
+        <p:cNvGrpSpPr/>
+        <p:nvPr/>
+      </p:nvGrpSpPr>
+      <p:grpSpPr>
+        <a:xfrm xmlns:a="http://schemas.openxmlformats.org/drawingml/2006/main"/>
+      </p:grpSpPr>
+      <p:sp>
+        <p:nvSpPr>
+          <p:cNvPr id="32" name="background">
+            <a:extLst xmlns:a="http://schemas.openxmlformats.org/drawingml/2006/main">
+              <a:ext uri="{FF2B5EF4-FFF2-40B4-BE49-F238E27FC236}">
+                <a16:creationId xmlns:a16="http://schemas.microsoft.com/office/drawing/2014/main" id="{3C18B250-CEE7-4DCD-9C7C-7E271E540249}"/>
+              </a:ext>
+            </a:extLst>
+          </p:cNvPr>
+          <p:cNvSpPr>
+            <a:spLocks xmlns:a="http://schemas.openxmlformats.org/drawingml/2006/main" noGrp="1"/>
+          </p:cNvSpPr>
+          <p:nvPr/>
+        </p:nvSpPr>
+        <p:spPr>
+          <a:xfrm xmlns:a="http://schemas.openxmlformats.org/drawingml/2006/main">
+            <a:off x="0" y="0"/>
+            <a:ext cx="11430000" cy="8572500"/>
+          </a:xfrm>
+          <a:prstGeom xmlns:a="http://schemas.openxmlformats.org/drawingml/2006/main" prst="rect">
+            <a:avLst/>
+          </a:prstGeom>
+          <a:solidFill xmlns:a="http://schemas.openxmlformats.org/drawingml/2006/main">
+            <a:srgbClr val="05070A"/>
+          </a:solidFill>
+          <a:ln xmlns:a="http://schemas.openxmlformats.org/drawingml/2006/main" w="0">
+            <a:solidFill>
+              <a:srgbClr val="05070A"/>
+            </a:solidFill>
+            <a:prstDash val="solid"/>
+          </a:ln>
+        </p:spPr>
+      </p:sp>
+      <p:sp>
+        <p:nvSpPr>
+          <p:cNvPr id="2" name="top-accent">
+            <a:extLst xmlns:a="http://schemas.openxmlformats.org/drawingml/2006/main">
+              <a:ext uri="{FF2B5EF4-FFF2-40B4-BE49-F238E27FC236}">
+                <a16:creationId xmlns:a16="http://schemas.microsoft.com/office/drawing/2014/main" id="{E7144CF6-9D49-43EB-A007-A3BA35A6642E}"/>
+              </a:ext>
+            </a:extLst>
+          </p:cNvPr>
+          <p:cNvSpPr>
+            <a:spLocks xmlns:a="http://schemas.openxmlformats.org/drawingml/2006/main" noGrp="1"/>
+          </p:cNvSpPr>
+          <p:nvPr/>
+        </p:nvSpPr>
+        <p:spPr>
+          <a:xfrm xmlns:a="http://schemas.openxmlformats.org/drawingml/2006/main">
+            <a:off x="0" y="0"/>
+            <a:ext cx="11430000" cy="76200"/>
+          </a:xfrm>
+          <a:prstGeom xmlns:a="http://schemas.openxmlformats.org/drawingml/2006/main" prst="rect">
+            <a:avLst/>
+          </a:prstGeom>
+          <a:solidFill xmlns:a="http://schemas.openxmlformats.org/drawingml/2006/main">
+            <a:srgbClr val="FF35D3"/>
+          </a:solidFill>
+          <a:ln xmlns:a="http://schemas.openxmlformats.org/drawingml/2006/main" w="0">
+            <a:solidFill>
+              <a:srgbClr val="FF35D3"/>
+            </a:solidFill>
+            <a:prstDash val="solid"/>
+          </a:ln>
+        </p:spPr>
+      </p:sp>
+      <p:sp>
+        <p:nvSpPr>
+          <p:cNvPr id="3" name="section">
+            <a:extLst xmlns:a="http://schemas.openxmlformats.org/drawingml/2006/main">
+              <a:ext uri="{FF2B5EF4-FFF2-40B4-BE49-F238E27FC236}">
+                <a16:creationId xmlns:a16="http://schemas.microsoft.com/office/drawing/2014/main" id="{455EEAFA-AA28-4575-A4C9-533D9A9CECE1}"/>
+              </a:ext>
+            </a:extLst>
+          </p:cNvPr>
+          <p:cNvSpPr>
+            <a:spLocks xmlns:a="http://schemas.openxmlformats.org/drawingml/2006/main" noGrp="1"/>
+          </p:cNvSpPr>
+          <p:nvPr/>
+        </p:nvSpPr>
+        <p:spPr>
+          <a:xfrm xmlns:a="http://schemas.openxmlformats.org/drawingml/2006/main">
+            <a:off x="609600" y="209550"/>
+            <a:ext cx="6667500" cy="400050"/>
+          </a:xfrm>
+          <a:prstGeom xmlns:a="http://schemas.openxmlformats.org/drawingml/2006/main" prst="rect">
+            <a:avLst/>
+          </a:prstGeom>
+          <a:noFill xmlns:a="http://schemas.openxmlformats.org/drawingml/2006/main"/>
+          <a:ln xmlns:a="http://schemas.openxmlformats.org/drawingml/2006/main" w="0">
+            <a:noFill/>
+            <a:prstDash val="solid"/>
+          </a:ln>
+        </p:spPr>
+        <p:txBody>
+          <a:bodyPr xmlns:a="http://schemas.openxmlformats.org/drawingml/2006/main" anchor="ctr"/>
+          <a:lstStyle xmlns:a="http://schemas.openxmlformats.org/drawingml/2006/main"/>
+          <a:p xmlns:a="http://schemas.openxmlformats.org/drawingml/2006/main">
+            <a:pPr algn="l">
+              <a:defRPr sz="1350" b="1">
+                <a:solidFill>
+                  <a:srgbClr val="FF35D3"/>
+                </a:solidFill>
+              </a:defRPr>
+            </a:pPr>
+            <a:r>
+              <a:rPr sz="1350" b="1">
+                <a:solidFill>
+                  <a:srgbClr val="FF35D3"/>
+                </a:solidFill>
+              </a:rPr>
+              <a:t>PART 2 / SLIPSTREAM</a:t>
+            </a:r>
+          </a:p>
+        </p:txBody>
+      </p:sp>
+      <p:sp>
+        <p:nvSpPr>
+          <p:cNvPr id="4" name="header-rule">
+            <a:extLst xmlns:a="http://schemas.openxmlformats.org/drawingml/2006/main">
+              <a:ext uri="{FF2B5EF4-FFF2-40B4-BE49-F238E27FC236}">
+                <a16:creationId xmlns:a16="http://schemas.microsoft.com/office/drawing/2014/main" id="{D37FAD9F-BEBC-4318-B5AA-60E8A019A6A4}"/>
+              </a:ext>
+            </a:extLst>
+          </p:cNvPr>
+          <p:cNvSpPr>
+            <a:spLocks xmlns:a="http://schemas.openxmlformats.org/drawingml/2006/main" noGrp="1"/>
+          </p:cNvSpPr>
+          <p:nvPr/>
+        </p:nvSpPr>
+        <p:spPr>
+          <a:xfrm xmlns:a="http://schemas.openxmlformats.org/drawingml/2006/main">
+            <a:off x="609600" y="685800"/>
+            <a:ext cx="10210800" cy="9525"/>
+          </a:xfrm>
+          <a:prstGeom xmlns:a="http://schemas.openxmlformats.org/drawingml/2006/main" prst="rect">
+            <a:avLst/>
+          </a:prstGeom>
+          <a:solidFill xmlns:a="http://schemas.openxmlformats.org/drawingml/2006/main">
+            <a:srgbClr val="78909C"/>
+          </a:solidFill>
+          <a:ln xmlns:a="http://schemas.openxmlformats.org/drawingml/2006/main" w="0">
+            <a:solidFill>
+              <a:srgbClr val="78909C"/>
+            </a:solidFill>
+            <a:prstDash val="solid"/>
+          </a:ln>
+        </p:spPr>
+      </p:sp>
+      <p:sp>
+        <p:nvSpPr>
+          <p:cNvPr id="5" name="title">
+            <a:extLst xmlns:a="http://schemas.openxmlformats.org/drawingml/2006/main">
+              <a:ext uri="{FF2B5EF4-FFF2-40B4-BE49-F238E27FC236}">
+                <a16:creationId xmlns:a16="http://schemas.microsoft.com/office/drawing/2014/main" id="{11646A5D-DB04-4D0E-983E-F003BDDD21D1}"/>
+              </a:ext>
+            </a:extLst>
+          </p:cNvPr>
+          <p:cNvSpPr>
+            <a:spLocks xmlns:a="http://schemas.openxmlformats.org/drawingml/2006/main" noGrp="1"/>
+          </p:cNvSpPr>
+          <p:nvPr/>
+        </p:nvSpPr>
+        <p:spPr>
+          <a:xfrm xmlns:a="http://schemas.openxmlformats.org/drawingml/2006/main">
+            <a:off x="609600" y="895350"/>
+            <a:ext cx="10210800" cy="666750"/>
+          </a:xfrm>
+          <a:prstGeom xmlns:a="http://schemas.openxmlformats.org/drawingml/2006/main" prst="rect">
+            <a:avLst/>
+          </a:prstGeom>
+          <a:noFill xmlns:a="http://schemas.openxmlformats.org/drawingml/2006/main"/>
+          <a:ln xmlns:a="http://schemas.openxmlformats.org/drawingml/2006/main" w="0">
+            <a:noFill/>
+            <a:prstDash val="solid"/>
+          </a:ln>
+        </p:spPr>
+        <p:txBody>
+          <a:bodyPr xmlns:a="http://schemas.openxmlformats.org/drawingml/2006/main" anchor="ctr"/>
+          <a:lstStyle xmlns:a="http://schemas.openxmlformats.org/drawingml/2006/main"/>
+          <a:p xmlns:a="http://schemas.openxmlformats.org/drawingml/2006/main">
+            <a:pPr algn="l">
+              <a:defRPr sz="2700" b="1">
+                <a:solidFill>
+                  <a:srgbClr val="F4F7FA"/>
+                </a:solidFill>
+              </a:defRPr>
+            </a:pPr>
+            <a:r>
+              <a:rPr sz="2700" b="1">
+                <a:solidFill>
+                  <a:srgbClr val="F4F7FA"/>
+                </a:solidFill>
+              </a:rPr>
+              <a:t>同じレーンを維持し、追い越しのBOOSTを作る</a:t>
+            </a:r>
+          </a:p>
+        </p:txBody>
+      </p:sp>
+      <p:sp>
+        <p:nvSpPr>
+          <p:cNvPr id="6" name="leader-car">
+            <a:extLst xmlns:a="http://schemas.openxmlformats.org/drawingml/2006/main">
+              <a:ext uri="{FF2B5EF4-FFF2-40B4-BE49-F238E27FC236}">
+                <a16:creationId xmlns:a16="http://schemas.microsoft.com/office/drawing/2014/main" id="{E21FEDB3-C0F7-463C-BBB4-4B22DFECC32D}"/>
+              </a:ext>
+            </a:extLst>
+          </p:cNvPr>
+          <p:cNvSpPr>
+            <a:spLocks xmlns:a="http://schemas.openxmlformats.org/drawingml/2006/main" noGrp="1"/>
+          </p:cNvSpPr>
+          <p:nvPr/>
+        </p:nvSpPr>
+        <p:spPr>
+          <a:xfrm xmlns:a="http://schemas.openxmlformats.org/drawingml/2006/main">
+            <a:off x="6762750" y="1981200"/>
+            <a:ext cx="1428750" cy="514350"/>
+          </a:xfrm>
+          <a:prstGeom xmlns:a="http://schemas.openxmlformats.org/drawingml/2006/main" prst="rect">
+            <a:avLst/>
+          </a:prstGeom>
+          <a:noFill xmlns:a="http://schemas.openxmlformats.org/drawingml/2006/main"/>
+          <a:ln xmlns:a="http://schemas.openxmlformats.org/drawingml/2006/main" w="28575">
+            <a:solidFill>
+              <a:srgbClr val="4B7DFF"/>
+            </a:solidFill>
+            <a:prstDash val="solid"/>
+          </a:ln>
+        </p:spPr>
+      </p:sp>
+      <p:sp>
+        <p:nvSpPr>
+          <p:cNvPr id="7" name="trailer-car">
+            <a:extLst xmlns:a="http://schemas.openxmlformats.org/drawingml/2006/main">
+              <a:ext uri="{FF2B5EF4-FFF2-40B4-BE49-F238E27FC236}">
+                <a16:creationId xmlns:a16="http://schemas.microsoft.com/office/drawing/2014/main" id="{21E31F6F-A55E-48EA-B21E-C460F16B6777}"/>
+              </a:ext>
+            </a:extLst>
+          </p:cNvPr>
+          <p:cNvSpPr>
+            <a:spLocks xmlns:a="http://schemas.openxmlformats.org/drawingml/2006/main" noGrp="1"/>
+          </p:cNvSpPr>
+          <p:nvPr/>
+        </p:nvSpPr>
+        <p:spPr>
+          <a:xfrm xmlns:a="http://schemas.openxmlformats.org/drawingml/2006/main">
+            <a:off x="3238500" y="1981200"/>
+            <a:ext cx="1428750" cy="514350"/>
+          </a:xfrm>
+          <a:prstGeom xmlns:a="http://schemas.openxmlformats.org/drawingml/2006/main" prst="rect">
+            <a:avLst/>
+          </a:prstGeom>
+          <a:noFill xmlns:a="http://schemas.openxmlformats.org/drawingml/2006/main"/>
+          <a:ln xmlns:a="http://schemas.openxmlformats.org/drawingml/2006/main" w="28575">
+            <a:solidFill>
+              <a:srgbClr val="FF506A"/>
+            </a:solidFill>
+            <a:prstDash val="solid"/>
+          </a:ln>
+        </p:spPr>
+      </p:sp>
+      <p:sp>
+        <p:nvSpPr>
+          <p:cNvPr id="8" name="leader-label">
+            <a:extLst xmlns:a="http://schemas.openxmlformats.org/drawingml/2006/main">
+              <a:ext uri="{FF2B5EF4-FFF2-40B4-BE49-F238E27FC236}">
+                <a16:creationId xmlns:a16="http://schemas.microsoft.com/office/drawing/2014/main" id="{F808F211-A9B3-4DD4-B529-1AF7B93AB92F}"/>
+              </a:ext>
+            </a:extLst>
+          </p:cNvPr>
+          <p:cNvSpPr>
+            <a:spLocks xmlns:a="http://schemas.openxmlformats.org/drawingml/2006/main" noGrp="1"/>
+          </p:cNvSpPr>
+          <p:nvPr/>
+        </p:nvSpPr>
+        <p:spPr>
+          <a:xfrm xmlns:a="http://schemas.openxmlformats.org/drawingml/2006/main">
+            <a:off x="6572250" y="2590800"/>
+            <a:ext cx="1809750" cy="323850"/>
+          </a:xfrm>
+          <a:prstGeom xmlns:a="http://schemas.openxmlformats.org/drawingml/2006/main" prst="rect">
+            <a:avLst/>
+          </a:prstGeom>
+          <a:noFill xmlns:a="http://schemas.openxmlformats.org/drawingml/2006/main"/>
+          <a:ln xmlns:a="http://schemas.openxmlformats.org/drawingml/2006/main" w="0">
+            <a:noFill/>
+            <a:prstDash val="solid"/>
+          </a:ln>
+        </p:spPr>
+        <p:txBody>
+          <a:bodyPr xmlns:a="http://schemas.openxmlformats.org/drawingml/2006/main" anchor="ctr"/>
+          <a:lstStyle xmlns:a="http://schemas.openxmlformats.org/drawingml/2006/main"/>
+          <a:p xmlns:a="http://schemas.openxmlformats.org/drawingml/2006/main">
+            <a:pPr algn="ctr">
+              <a:defRPr sz="1275" b="1">
+                <a:solidFill>
+                  <a:srgbClr val="4B7DFF"/>
+                </a:solidFill>
+              </a:defRPr>
+            </a:pPr>
+            <a:r>
+              <a:rPr sz="1275" b="1">
+                <a:solidFill>
+                  <a:srgbClr val="4B7DFF"/>
+                </a:solidFill>
+              </a:rPr>
+              <a:t>LEADER / 前車</a:t>
+            </a:r>
+          </a:p>
+        </p:txBody>
+      </p:sp>
+      <p:sp>
+        <p:nvSpPr>
+          <p:cNvPr id="9" name="trailer-label">
+            <a:extLst xmlns:a="http://schemas.openxmlformats.org/drawingml/2006/main">
+              <a:ext uri="{FF2B5EF4-FFF2-40B4-BE49-F238E27FC236}">
+                <a16:creationId xmlns:a16="http://schemas.microsoft.com/office/drawing/2014/main" id="{405104E5-4BC3-4492-90F5-54C33E0F2475}"/>
+              </a:ext>
+            </a:extLst>
+          </p:cNvPr>
+          <p:cNvSpPr>
+            <a:spLocks xmlns:a="http://schemas.openxmlformats.org/drawingml/2006/main" noGrp="1"/>
+          </p:cNvSpPr>
+          <p:nvPr/>
+        </p:nvSpPr>
+        <p:spPr>
+          <a:xfrm xmlns:a="http://schemas.openxmlformats.org/drawingml/2006/main">
+            <a:off x="3048000" y="2590800"/>
+            <a:ext cx="1809750" cy="323850"/>
+          </a:xfrm>
+          <a:prstGeom xmlns:a="http://schemas.openxmlformats.org/drawingml/2006/main" prst="rect">
+            <a:avLst/>
+          </a:prstGeom>
+          <a:noFill xmlns:a="http://schemas.openxmlformats.org/drawingml/2006/main"/>
+          <a:ln xmlns:a="http://schemas.openxmlformats.org/drawingml/2006/main" w="0">
+            <a:noFill/>
+            <a:prstDash val="solid"/>
+          </a:ln>
+        </p:spPr>
+        <p:txBody>
+          <a:bodyPr xmlns:a="http://schemas.openxmlformats.org/drawingml/2006/main" anchor="ctr"/>
+          <a:lstStyle xmlns:a="http://schemas.openxmlformats.org/drawingml/2006/main"/>
+          <a:p xmlns:a="http://schemas.openxmlformats.org/drawingml/2006/main">
+            <a:pPr algn="ctr">
+              <a:defRPr sz="1275" b="1">
+                <a:solidFill>
+                  <a:srgbClr val="FF506A"/>
+                </a:solidFill>
+              </a:defRPr>
+            </a:pPr>
+            <a:r>
+              <a:rPr sz="1275" b="1">
+                <a:solidFill>
+                  <a:srgbClr val="FF506A"/>
+                </a:solidFill>
+              </a:rPr>
+              <a:t>TRAILING / 後続</a:t>
+            </a:r>
+          </a:p>
+        </p:txBody>
+      </p:sp>
+      <p:sp>
+        <p:nvSpPr>
+          <p:cNvPr id="10" name="draft-line-1">
+            <a:extLst xmlns:a="http://schemas.openxmlformats.org/drawingml/2006/main">
+              <a:ext uri="{FF2B5EF4-FFF2-40B4-BE49-F238E27FC236}">
+                <a16:creationId xmlns:a16="http://schemas.microsoft.com/office/drawing/2014/main" id="{E902698E-A763-48E6-B2BF-13A2AF23E032}"/>
+              </a:ext>
+            </a:extLst>
+          </p:cNvPr>
+          <p:cNvSpPr>
+            <a:spLocks xmlns:a="http://schemas.openxmlformats.org/drawingml/2006/main" noGrp="1"/>
+          </p:cNvSpPr>
+          <p:nvPr/>
+        </p:nvSpPr>
+        <p:spPr>
+          <a:xfrm xmlns:a="http://schemas.openxmlformats.org/drawingml/2006/main">
+            <a:off x="4810125" y="2114550"/>
+            <a:ext cx="1809750" cy="19050"/>
+          </a:xfrm>
+          <a:prstGeom xmlns:a="http://schemas.openxmlformats.org/drawingml/2006/main" prst="rect">
+            <a:avLst/>
+          </a:prstGeom>
+          <a:solidFill xmlns:a="http://schemas.openxmlformats.org/drawingml/2006/main">
+            <a:srgbClr val="00E6E6"/>
+          </a:solidFill>
+          <a:ln xmlns:a="http://schemas.openxmlformats.org/drawingml/2006/main" w="0">
+            <a:solidFill>
+              <a:srgbClr val="00E6E6"/>
+            </a:solidFill>
+            <a:prstDash val="solid"/>
+          </a:ln>
+        </p:spPr>
+      </p:sp>
+      <p:sp>
+        <p:nvSpPr>
+          <p:cNvPr id="11" name="draft-line-2">
+            <a:extLst xmlns:a="http://schemas.openxmlformats.org/drawingml/2006/main">
+              <a:ext uri="{FF2B5EF4-FFF2-40B4-BE49-F238E27FC236}">
+                <a16:creationId xmlns:a16="http://schemas.microsoft.com/office/drawing/2014/main" id="{A2D907DC-28E4-4828-89DF-85323C3E83E3}"/>
+              </a:ext>
+            </a:extLst>
+          </p:cNvPr>
+          <p:cNvSpPr>
+            <a:spLocks xmlns:a="http://schemas.openxmlformats.org/drawingml/2006/main" noGrp="1"/>
+          </p:cNvSpPr>
+          <p:nvPr/>
+        </p:nvSpPr>
+        <p:spPr>
+          <a:xfrm xmlns:a="http://schemas.openxmlformats.org/drawingml/2006/main">
+            <a:off x="5000625" y="2305050"/>
+            <a:ext cx="1428750" cy="19050"/>
+          </a:xfrm>
+          <a:prstGeom xmlns:a="http://schemas.openxmlformats.org/drawingml/2006/main" prst="rect">
+            <a:avLst/>
+          </a:prstGeom>
+          <a:solidFill xmlns:a="http://schemas.openxmlformats.org/drawingml/2006/main">
+            <a:srgbClr val="00E6E6"/>
+          </a:solidFill>
+          <a:ln xmlns:a="http://schemas.openxmlformats.org/drawingml/2006/main" w="0">
+            <a:solidFill>
+              <a:srgbClr val="00E6E6"/>
+            </a:solidFill>
+            <a:prstDash val="solid"/>
+          </a:ln>
+        </p:spPr>
+      </p:sp>
+      <p:sp>
+        <p:nvSpPr>
+          <p:cNvPr id="12" name="stage-01">
+            <a:extLst xmlns:a="http://schemas.openxmlformats.org/drawingml/2006/main">
+              <a:ext uri="{FF2B5EF4-FFF2-40B4-BE49-F238E27FC236}">
+                <a16:creationId xmlns:a16="http://schemas.microsoft.com/office/drawing/2014/main" id="{941E23A3-F389-4EBF-B4AC-5163385F0F8F}"/>
+              </a:ext>
+            </a:extLst>
+          </p:cNvPr>
+          <p:cNvSpPr>
+            <a:spLocks xmlns:a="http://schemas.openxmlformats.org/drawingml/2006/main" noGrp="1"/>
+          </p:cNvSpPr>
+          <p:nvPr/>
+        </p:nvSpPr>
+        <p:spPr>
+          <a:xfrm xmlns:a="http://schemas.openxmlformats.org/drawingml/2006/main">
+            <a:off x="685800" y="3524250"/>
+            <a:ext cx="609600" cy="476250"/>
+          </a:xfrm>
+          <a:prstGeom xmlns:a="http://schemas.openxmlformats.org/drawingml/2006/main" prst="rect">
+            <a:avLst/>
+          </a:prstGeom>
+          <a:noFill xmlns:a="http://schemas.openxmlformats.org/drawingml/2006/main"/>
+          <a:ln xmlns:a="http://schemas.openxmlformats.org/drawingml/2006/main" w="0">
+            <a:noFill/>
+            <a:prstDash val="solid"/>
+          </a:ln>
+        </p:spPr>
+        <p:txBody>
+          <a:bodyPr xmlns:a="http://schemas.openxmlformats.org/drawingml/2006/main" anchor="ctr"/>
+          <a:lstStyle xmlns:a="http://schemas.openxmlformats.org/drawingml/2006/main"/>
+          <a:p xmlns:a="http://schemas.openxmlformats.org/drawingml/2006/main">
+            <a:pPr algn="l">
+              <a:defRPr sz="1650" b="1">
+                <a:solidFill>
+                  <a:srgbClr val="00E6E6"/>
+                </a:solidFill>
+              </a:defRPr>
+            </a:pPr>
+            <a:r>
+              <a:rPr sz="1650" b="1">
+                <a:solidFill>
+                  <a:srgbClr val="00E6E6"/>
+                </a:solidFill>
+              </a:rPr>
+              <a:t>01</a:t>
+            </a:r>
+          </a:p>
+        </p:txBody>
+      </p:sp>
+      <p:sp>
+        <p:nvSpPr>
+          <p:cNvPr id="13" name="stage-rule-01">
+            <a:extLst xmlns:a="http://schemas.openxmlformats.org/drawingml/2006/main">
+              <a:ext uri="{FF2B5EF4-FFF2-40B4-BE49-F238E27FC236}">
+                <a16:creationId xmlns:a16="http://schemas.microsoft.com/office/drawing/2014/main" id="{14DD0EE4-CCB6-411D-94C9-3EF36CCF2393}"/>
+              </a:ext>
+            </a:extLst>
+          </p:cNvPr>
+          <p:cNvSpPr>
+            <a:spLocks xmlns:a="http://schemas.openxmlformats.org/drawingml/2006/main" noGrp="1"/>
+          </p:cNvSpPr>
+          <p:nvPr/>
+        </p:nvSpPr>
+        <p:spPr>
+          <a:xfrm xmlns:a="http://schemas.openxmlformats.org/drawingml/2006/main">
+            <a:off x="685800" y="4095750"/>
+            <a:ext cx="2857500" cy="28575"/>
+          </a:xfrm>
+          <a:prstGeom xmlns:a="http://schemas.openxmlformats.org/drawingml/2006/main" prst="rect">
+            <a:avLst/>
+          </a:prstGeom>
+          <a:solidFill xmlns:a="http://schemas.openxmlformats.org/drawingml/2006/main">
+            <a:srgbClr val="00E6E6"/>
+          </a:solidFill>
+          <a:ln xmlns:a="http://schemas.openxmlformats.org/drawingml/2006/main" w="0">
+            <a:solidFill>
+              <a:srgbClr val="00E6E6"/>
+            </a:solidFill>
+            <a:prstDash val="solid"/>
+          </a:ln>
+        </p:spPr>
+      </p:sp>
+      <p:sp>
+        <p:nvSpPr>
+          <p:cNvPr id="14" name="stage-head-01">
+            <a:extLst xmlns:a="http://schemas.openxmlformats.org/drawingml/2006/main">
+              <a:ext uri="{FF2B5EF4-FFF2-40B4-BE49-F238E27FC236}">
+                <a16:creationId xmlns:a16="http://schemas.microsoft.com/office/drawing/2014/main" id="{364774CA-5723-4B64-832C-373CFE3ACB2C}"/>
+              </a:ext>
+            </a:extLst>
+          </p:cNvPr>
+          <p:cNvSpPr>
+            <a:spLocks xmlns:a="http://schemas.openxmlformats.org/drawingml/2006/main" noGrp="1"/>
+          </p:cNvSpPr>
+          <p:nvPr/>
+        </p:nvSpPr>
+        <p:spPr>
+          <a:xfrm xmlns:a="http://schemas.openxmlformats.org/drawingml/2006/main">
+            <a:off x="685800" y="4267200"/>
+            <a:ext cx="2857500" cy="457200"/>
+          </a:xfrm>
+          <a:prstGeom xmlns:a="http://schemas.openxmlformats.org/drawingml/2006/main" prst="rect">
+            <a:avLst/>
+          </a:prstGeom>
+          <a:noFill xmlns:a="http://schemas.openxmlformats.org/drawingml/2006/main"/>
+          <a:ln xmlns:a="http://schemas.openxmlformats.org/drawingml/2006/main" w="0">
+            <a:noFill/>
+            <a:prstDash val="solid"/>
+          </a:ln>
+        </p:spPr>
+        <p:txBody>
+          <a:bodyPr xmlns:a="http://schemas.openxmlformats.org/drawingml/2006/main" anchor="ctr"/>
+          <a:lstStyle xmlns:a="http://schemas.openxmlformats.org/drawingml/2006/main"/>
+          <a:p xmlns:a="http://schemas.openxmlformats.org/drawingml/2006/main">
+            <a:pPr algn="l">
+              <a:defRPr sz="1725" b="1">
+                <a:solidFill>
+                  <a:srgbClr val="00E6E6"/>
+                </a:solidFill>
+              </a:defRPr>
+            </a:pPr>
+            <a:r>
+              <a:rPr sz="1725" b="1">
+                <a:solidFill>
+                  <a:srgbClr val="00E6E6"/>
+                </a:solidFill>
+              </a:rPr>
+              <a:t>ALIGN / 同じレーン</a:t>
+            </a:r>
+          </a:p>
+        </p:txBody>
+      </p:sp>
+      <p:sp>
+        <p:nvSpPr>
+          <p:cNvPr id="15" name="stage-body-01">
+            <a:extLst xmlns:a="http://schemas.openxmlformats.org/drawingml/2006/main">
+              <a:ext uri="{FF2B5EF4-FFF2-40B4-BE49-F238E27FC236}">
+                <a16:creationId xmlns:a16="http://schemas.microsoft.com/office/drawing/2014/main" id="{4014D785-61AD-4B73-B98E-4FBE5DEDBA01}"/>
+              </a:ext>
+            </a:extLst>
+          </p:cNvPr>
+          <p:cNvSpPr>
+            <a:spLocks xmlns:a="http://schemas.openxmlformats.org/drawingml/2006/main" noGrp="1"/>
+          </p:cNvSpPr>
+          <p:nvPr/>
+        </p:nvSpPr>
+        <p:spPr>
+          <a:xfrm xmlns:a="http://schemas.openxmlformats.org/drawingml/2006/main">
+            <a:off x="685800" y="4857750"/>
+            <a:ext cx="2857500" cy="723900"/>
+          </a:xfrm>
+          <a:prstGeom xmlns:a="http://schemas.openxmlformats.org/drawingml/2006/main" prst="rect">
+            <a:avLst/>
+          </a:prstGeom>
+          <a:noFill xmlns:a="http://schemas.openxmlformats.org/drawingml/2006/main"/>
+          <a:ln xmlns:a="http://schemas.openxmlformats.org/drawingml/2006/main" w="0">
+            <a:noFill/>
+            <a:prstDash val="solid"/>
+          </a:ln>
+        </p:spPr>
+        <p:txBody>
+          <a:bodyPr xmlns:a="http://schemas.openxmlformats.org/drawingml/2006/main" anchor="ctr"/>
+          <a:lstStyle xmlns:a="http://schemas.openxmlformats.org/drawingml/2006/main"/>
+          <a:p xmlns:a="http://schemas.openxmlformats.org/drawingml/2006/main">
+            <a:pPr algn="l">
+              <a:defRPr sz="1425" b="0">
+                <a:solidFill>
+                  <a:srgbClr val="F4F7FA"/>
+                </a:solidFill>
+              </a:defRPr>
+            </a:pPr>
+            <a:r>
+              <a:rPr sz="1425" b="0">
+                <a:solidFill>
+                  <a:srgbClr val="F4F7FA"/>
+                </a:solidFill>
+              </a:rPr>
+              <a:t>前車のすぐ後ろへ滑らかに合わせる</a:t>
+            </a:r>
+          </a:p>
+        </p:txBody>
+      </p:sp>
+      <p:sp>
+        <p:nvSpPr>
+          <p:cNvPr id="16" name="stage-02">
+            <a:extLst xmlns:a="http://schemas.openxmlformats.org/drawingml/2006/main">
+              <a:ext uri="{FF2B5EF4-FFF2-40B4-BE49-F238E27FC236}">
+                <a16:creationId xmlns:a16="http://schemas.microsoft.com/office/drawing/2014/main" id="{CE6958C8-0AC8-4518-B0D0-E90B6F44D02B}"/>
+              </a:ext>
+            </a:extLst>
+          </p:cNvPr>
+          <p:cNvSpPr>
+            <a:spLocks xmlns:a="http://schemas.openxmlformats.org/drawingml/2006/main" noGrp="1"/>
+          </p:cNvSpPr>
+          <p:nvPr/>
+        </p:nvSpPr>
+        <p:spPr>
+          <a:xfrm xmlns:a="http://schemas.openxmlformats.org/drawingml/2006/main">
+            <a:off x="4038600" y="3524250"/>
+            <a:ext cx="609600" cy="476250"/>
+          </a:xfrm>
+          <a:prstGeom xmlns:a="http://schemas.openxmlformats.org/drawingml/2006/main" prst="rect">
+            <a:avLst/>
+          </a:prstGeom>
+          <a:noFill xmlns:a="http://schemas.openxmlformats.org/drawingml/2006/main"/>
+          <a:ln xmlns:a="http://schemas.openxmlformats.org/drawingml/2006/main" w="0">
+            <a:noFill/>
+            <a:prstDash val="solid"/>
+          </a:ln>
+        </p:spPr>
+        <p:txBody>
+          <a:bodyPr xmlns:a="http://schemas.openxmlformats.org/drawingml/2006/main" anchor="ctr"/>
+          <a:lstStyle xmlns:a="http://schemas.openxmlformats.org/drawingml/2006/main"/>
+          <a:p xmlns:a="http://schemas.openxmlformats.org/drawingml/2006/main">
+            <a:pPr algn="l">
+              <a:defRPr sz="1650" b="1">
+                <a:solidFill>
+                  <a:srgbClr val="FFD34E"/>
+                </a:solidFill>
+              </a:defRPr>
+            </a:pPr>
+            <a:r>
+              <a:rPr sz="1650" b="1">
+                <a:solidFill>
+                  <a:srgbClr val="FFD34E"/>
+                </a:solidFill>
+              </a:rPr>
+              <a:t>02</a:t>
+            </a:r>
+          </a:p>
+        </p:txBody>
+      </p:sp>
+      <p:sp>
+        <p:nvSpPr>
+          <p:cNvPr id="17" name="stage-rule-02">
+            <a:extLst xmlns:a="http://schemas.openxmlformats.org/drawingml/2006/main">
+              <a:ext uri="{FF2B5EF4-FFF2-40B4-BE49-F238E27FC236}">
+                <a16:creationId xmlns:a16="http://schemas.microsoft.com/office/drawing/2014/main" id="{8BE64C86-C114-4DC7-A5D6-4C8EFFAC87D9}"/>
+              </a:ext>
+            </a:extLst>
+          </p:cNvPr>
+          <p:cNvSpPr>
+            <a:spLocks xmlns:a="http://schemas.openxmlformats.org/drawingml/2006/main" noGrp="1"/>
+          </p:cNvSpPr>
+          <p:nvPr/>
+        </p:nvSpPr>
+        <p:spPr>
+          <a:xfrm xmlns:a="http://schemas.openxmlformats.org/drawingml/2006/main">
+            <a:off x="4038600" y="4095750"/>
+            <a:ext cx="2857500" cy="28575"/>
+          </a:xfrm>
+          <a:prstGeom xmlns:a="http://schemas.openxmlformats.org/drawingml/2006/main" prst="rect">
+            <a:avLst/>
+          </a:prstGeom>
+          <a:solidFill xmlns:a="http://schemas.openxmlformats.org/drawingml/2006/main">
+            <a:srgbClr val="FFD34E"/>
+          </a:solidFill>
+          <a:ln xmlns:a="http://schemas.openxmlformats.org/drawingml/2006/main" w="0">
+            <a:solidFill>
+              <a:srgbClr val="FFD34E"/>
+            </a:solidFill>
+            <a:prstDash val="solid"/>
+          </a:ln>
+        </p:spPr>
+      </p:sp>
+      <p:sp>
+        <p:nvSpPr>
+          <p:cNvPr id="18" name="stage-head-02">
+            <a:extLst xmlns:a="http://schemas.openxmlformats.org/drawingml/2006/main">
+              <a:ext uri="{FF2B5EF4-FFF2-40B4-BE49-F238E27FC236}">
+                <a16:creationId xmlns:a16="http://schemas.microsoft.com/office/drawing/2014/main" id="{8DABBD53-517D-4617-8A4B-D0F8246BD3C3}"/>
+              </a:ext>
+            </a:extLst>
+          </p:cNvPr>
+          <p:cNvSpPr>
+            <a:spLocks xmlns:a="http://schemas.openxmlformats.org/drawingml/2006/main" noGrp="1"/>
+          </p:cNvSpPr>
+          <p:nvPr/>
+        </p:nvSpPr>
+        <p:spPr>
+          <a:xfrm xmlns:a="http://schemas.openxmlformats.org/drawingml/2006/main">
+            <a:off x="4038600" y="4267200"/>
+            <a:ext cx="2857500" cy="457200"/>
+          </a:xfrm>
+          <a:prstGeom xmlns:a="http://schemas.openxmlformats.org/drawingml/2006/main" prst="rect">
+            <a:avLst/>
+          </a:prstGeom>
+          <a:noFill xmlns:a="http://schemas.openxmlformats.org/drawingml/2006/main"/>
+          <a:ln xmlns:a="http://schemas.openxmlformats.org/drawingml/2006/main" w="0">
+            <a:noFill/>
+            <a:prstDash val="solid"/>
+          </a:ln>
+        </p:spPr>
+        <p:txBody>
+          <a:bodyPr xmlns:a="http://schemas.openxmlformats.org/drawingml/2006/main" anchor="ctr"/>
+          <a:lstStyle xmlns:a="http://schemas.openxmlformats.org/drawingml/2006/main"/>
+          <a:p xmlns:a="http://schemas.openxmlformats.org/drawingml/2006/main">
+            <a:pPr algn="l">
+              <a:defRPr sz="1725" b="1">
+                <a:solidFill>
+                  <a:srgbClr val="FFD34E"/>
+                </a:solidFill>
+              </a:defRPr>
+            </a:pPr>
+            <a:r>
+              <a:rPr sz="1725" b="1">
+                <a:solidFill>
+                  <a:srgbClr val="FFD34E"/>
+                </a:solidFill>
+              </a:rPr>
+              <a:t>HOLD / 約0.5秒</a:t>
+            </a:r>
+          </a:p>
+        </p:txBody>
+      </p:sp>
+      <p:sp>
+        <p:nvSpPr>
+          <p:cNvPr id="19" name="stage-body-02">
+            <a:extLst xmlns:a="http://schemas.openxmlformats.org/drawingml/2006/main">
+              <a:ext uri="{FF2B5EF4-FFF2-40B4-BE49-F238E27FC236}">
+                <a16:creationId xmlns:a16="http://schemas.microsoft.com/office/drawing/2014/main" id="{C5EB8492-83E4-42D3-AFEB-F92630F51CD8}"/>
+              </a:ext>
+            </a:extLst>
+          </p:cNvPr>
+          <p:cNvSpPr>
+            <a:spLocks xmlns:a="http://schemas.openxmlformats.org/drawingml/2006/main" noGrp="1"/>
+          </p:cNvSpPr>
+          <p:nvPr/>
+        </p:nvSpPr>
+        <p:spPr>
+          <a:xfrm xmlns:a="http://schemas.openxmlformats.org/drawingml/2006/main">
+            <a:off x="4038600" y="4857750"/>
+            <a:ext cx="2857500" cy="723900"/>
+          </a:xfrm>
+          <a:prstGeom xmlns:a="http://schemas.openxmlformats.org/drawingml/2006/main" prst="rect">
+            <a:avLst/>
+          </a:prstGeom>
+          <a:noFill xmlns:a="http://schemas.openxmlformats.org/drawingml/2006/main"/>
+          <a:ln xmlns:a="http://schemas.openxmlformats.org/drawingml/2006/main" w="0">
+            <a:noFill/>
+            <a:prstDash val="solid"/>
+          </a:ln>
+        </p:spPr>
+        <p:txBody>
+          <a:bodyPr xmlns:a="http://schemas.openxmlformats.org/drawingml/2006/main" anchor="ctr"/>
+          <a:lstStyle xmlns:a="http://schemas.openxmlformats.org/drawingml/2006/main"/>
+          <a:p xmlns:a="http://schemas.openxmlformats.org/drawingml/2006/main">
+            <a:pPr algn="l">
+              <a:defRPr sz="1425" b="0">
+                <a:solidFill>
+                  <a:srgbClr val="F4F7FA"/>
+                </a:solidFill>
+              </a:defRPr>
+            </a:pPr>
+            <a:r>
+              <a:rPr sz="1425" b="0">
+                <a:solidFill>
+                  <a:srgbClr val="F4F7FA"/>
+                </a:solidFill>
+              </a:rPr>
+              <a:t>10回の固定更新を維持して成立</a:t>
+            </a:r>
+          </a:p>
+        </p:txBody>
+      </p:sp>
+      <p:sp>
+        <p:nvSpPr>
+          <p:cNvPr id="20" name="stage-03">
+            <a:extLst xmlns:a="http://schemas.openxmlformats.org/drawingml/2006/main">
+              <a:ext uri="{FF2B5EF4-FFF2-40B4-BE49-F238E27FC236}">
+                <a16:creationId xmlns:a16="http://schemas.microsoft.com/office/drawing/2014/main" id="{5CC3D515-FABE-4F9D-8CBC-D1B1C37A2B60}"/>
+              </a:ext>
+            </a:extLst>
+          </p:cNvPr>
+          <p:cNvSpPr>
+            <a:spLocks xmlns:a="http://schemas.openxmlformats.org/drawingml/2006/main" noGrp="1"/>
+          </p:cNvSpPr>
+          <p:nvPr/>
+        </p:nvSpPr>
+        <p:spPr>
+          <a:xfrm xmlns:a="http://schemas.openxmlformats.org/drawingml/2006/main">
+            <a:off x="7848600" y="3524250"/>
+            <a:ext cx="609600" cy="476250"/>
+          </a:xfrm>
+          <a:prstGeom xmlns:a="http://schemas.openxmlformats.org/drawingml/2006/main" prst="rect">
+            <a:avLst/>
+          </a:prstGeom>
+          <a:noFill xmlns:a="http://schemas.openxmlformats.org/drawingml/2006/main"/>
+          <a:ln xmlns:a="http://schemas.openxmlformats.org/drawingml/2006/main" w="0">
+            <a:noFill/>
+            <a:prstDash val="solid"/>
+          </a:ln>
+        </p:spPr>
+        <p:txBody>
+          <a:bodyPr xmlns:a="http://schemas.openxmlformats.org/drawingml/2006/main" anchor="ctr"/>
+          <a:lstStyle xmlns:a="http://schemas.openxmlformats.org/drawingml/2006/main"/>
+          <a:p xmlns:a="http://schemas.openxmlformats.org/drawingml/2006/main">
+            <a:pPr algn="l">
+              <a:defRPr sz="1650" b="1">
+                <a:solidFill>
+                  <a:srgbClr val="FF35D3"/>
+                </a:solidFill>
+              </a:defRPr>
+            </a:pPr>
+            <a:r>
+              <a:rPr sz="1650" b="1">
+                <a:solidFill>
+                  <a:srgbClr val="FF35D3"/>
+                </a:solidFill>
+              </a:rPr>
+              <a:t>03</a:t>
+            </a:r>
+          </a:p>
+        </p:txBody>
+      </p:sp>
+      <p:sp>
+        <p:nvSpPr>
+          <p:cNvPr id="21" name="stage-rule-03">
+            <a:extLst xmlns:a="http://schemas.openxmlformats.org/drawingml/2006/main">
+              <a:ext uri="{FF2B5EF4-FFF2-40B4-BE49-F238E27FC236}">
+                <a16:creationId xmlns:a16="http://schemas.microsoft.com/office/drawing/2014/main" id="{D6E9717F-EC81-4B08-8717-6E0A31994104}"/>
+              </a:ext>
+            </a:extLst>
+          </p:cNvPr>
+          <p:cNvSpPr>
+            <a:spLocks xmlns:a="http://schemas.openxmlformats.org/drawingml/2006/main" noGrp="1"/>
+          </p:cNvSpPr>
+          <p:nvPr/>
+        </p:nvSpPr>
+        <p:spPr>
+          <a:xfrm xmlns:a="http://schemas.openxmlformats.org/drawingml/2006/main">
+            <a:off x="7848600" y="4095750"/>
+            <a:ext cx="2857500" cy="28575"/>
+          </a:xfrm>
+          <a:prstGeom xmlns:a="http://schemas.openxmlformats.org/drawingml/2006/main" prst="rect">
+            <a:avLst/>
+          </a:prstGeom>
+          <a:solidFill xmlns:a="http://schemas.openxmlformats.org/drawingml/2006/main">
+            <a:srgbClr val="FF35D3"/>
+          </a:solidFill>
+          <a:ln xmlns:a="http://schemas.openxmlformats.org/drawingml/2006/main" w="0">
+            <a:solidFill>
+              <a:srgbClr val="FF35D3"/>
+            </a:solidFill>
+            <a:prstDash val="solid"/>
+          </a:ln>
+        </p:spPr>
+      </p:sp>
+      <p:sp>
+        <p:nvSpPr>
+          <p:cNvPr id="22" name="stage-head-03">
+            <a:extLst xmlns:a="http://schemas.openxmlformats.org/drawingml/2006/main">
+              <a:ext uri="{FF2B5EF4-FFF2-40B4-BE49-F238E27FC236}">
+                <a16:creationId xmlns:a16="http://schemas.microsoft.com/office/drawing/2014/main" id="{DB4E3BA2-F02C-4B77-833D-CF4C2DEC590E}"/>
+              </a:ext>
+            </a:extLst>
+          </p:cNvPr>
+          <p:cNvSpPr>
+            <a:spLocks xmlns:a="http://schemas.openxmlformats.org/drawingml/2006/main" noGrp="1"/>
+          </p:cNvSpPr>
+          <p:nvPr/>
+        </p:nvSpPr>
+        <p:spPr>
+          <a:xfrm xmlns:a="http://schemas.openxmlformats.org/drawingml/2006/main">
+            <a:off x="7848600" y="4267200"/>
+            <a:ext cx="2857500" cy="457200"/>
+          </a:xfrm>
+          <a:prstGeom xmlns:a="http://schemas.openxmlformats.org/drawingml/2006/main" prst="rect">
+            <a:avLst/>
+          </a:prstGeom>
+          <a:noFill xmlns:a="http://schemas.openxmlformats.org/drawingml/2006/main"/>
+          <a:ln xmlns:a="http://schemas.openxmlformats.org/drawingml/2006/main" w="0">
+            <a:noFill/>
+            <a:prstDash val="solid"/>
+          </a:ln>
+        </p:spPr>
+        <p:txBody>
+          <a:bodyPr xmlns:a="http://schemas.openxmlformats.org/drawingml/2006/main" anchor="ctr"/>
+          <a:lstStyle xmlns:a="http://schemas.openxmlformats.org/drawingml/2006/main"/>
+          <a:p xmlns:a="http://schemas.openxmlformats.org/drawingml/2006/main">
+            <a:pPr algn="l">
+              <a:defRPr sz="1725" b="1">
+                <a:solidFill>
+                  <a:srgbClr val="FF35D3"/>
+                </a:solidFill>
+              </a:defRPr>
+            </a:pPr>
+            <a:r>
+              <a:rPr sz="1725" b="1">
+                <a:solidFill>
+                  <a:srgbClr val="FF35D3"/>
+                </a:solidFill>
+              </a:rPr>
+              <a:t>RECOVER / BOOST回復</a:t>
+            </a:r>
+          </a:p>
+        </p:txBody>
+      </p:sp>
+      <p:sp>
+        <p:nvSpPr>
+          <p:cNvPr id="23" name="stage-body-03">
+            <a:extLst xmlns:a="http://schemas.openxmlformats.org/drawingml/2006/main">
+              <a:ext uri="{FF2B5EF4-FFF2-40B4-BE49-F238E27FC236}">
+                <a16:creationId xmlns:a16="http://schemas.microsoft.com/office/drawing/2014/main" id="{1A5ED4C7-9763-4544-A9FA-276FCA0BEB8A}"/>
+              </a:ext>
+            </a:extLst>
+          </p:cNvPr>
+          <p:cNvSpPr>
+            <a:spLocks xmlns:a="http://schemas.openxmlformats.org/drawingml/2006/main" noGrp="1"/>
+          </p:cNvSpPr>
+          <p:nvPr/>
+        </p:nvSpPr>
+        <p:spPr>
+          <a:xfrm xmlns:a="http://schemas.openxmlformats.org/drawingml/2006/main">
+            <a:off x="7848600" y="4857750"/>
+            <a:ext cx="2857500" cy="723900"/>
+          </a:xfrm>
+          <a:prstGeom xmlns:a="http://schemas.openxmlformats.org/drawingml/2006/main" prst="rect">
+            <a:avLst/>
+          </a:prstGeom>
+          <a:noFill xmlns:a="http://schemas.openxmlformats.org/drawingml/2006/main"/>
+          <a:ln xmlns:a="http://schemas.openxmlformats.org/drawingml/2006/main" w="0">
+            <a:noFill/>
+            <a:prstDash val="solid"/>
+          </a:ln>
+        </p:spPr>
+        <p:txBody>
+          <a:bodyPr xmlns:a="http://schemas.openxmlformats.org/drawingml/2006/main" anchor="ctr"/>
+          <a:lstStyle xmlns:a="http://schemas.openxmlformats.org/drawingml/2006/main"/>
+          <a:p xmlns:a="http://schemas.openxmlformats.org/drawingml/2006/main">
+            <a:pPr algn="l">
+              <a:defRPr sz="1425" b="0">
+                <a:solidFill>
+                  <a:srgbClr val="F4F7FA"/>
+                </a:solidFill>
+              </a:defRPr>
+            </a:pPr>
+            <a:r>
+              <a:rPr sz="1425" b="0">
+                <a:solidFill>
+                  <a:srgbClr val="F4F7FA"/>
+                </a:solidFill>
+              </a:rPr>
+              <a:t>成立中は毎更新8回復し車体が高輝度化</a:t>
+            </a:r>
+          </a:p>
+        </p:txBody>
+      </p:sp>
+      <p:sp>
+        <p:nvSpPr>
+          <p:cNvPr id="24" name="lower-rule">
+            <a:extLst xmlns:a="http://schemas.openxmlformats.org/drawingml/2006/main">
+              <a:ext uri="{FF2B5EF4-FFF2-40B4-BE49-F238E27FC236}">
+                <a16:creationId xmlns:a16="http://schemas.microsoft.com/office/drawing/2014/main" id="{518B8BE0-4973-4043-ADF0-B0993D72B126}"/>
+              </a:ext>
+            </a:extLst>
+          </p:cNvPr>
+          <p:cNvSpPr>
+            <a:spLocks xmlns:a="http://schemas.openxmlformats.org/drawingml/2006/main" noGrp="1"/>
+          </p:cNvSpPr>
+          <p:nvPr/>
+        </p:nvSpPr>
+        <p:spPr>
+          <a:xfrm xmlns:a="http://schemas.openxmlformats.org/drawingml/2006/main">
+            <a:off x="685800" y="6057900"/>
+            <a:ext cx="10058400" cy="9525"/>
+          </a:xfrm>
+          <a:prstGeom xmlns:a="http://schemas.openxmlformats.org/drawingml/2006/main" prst="rect">
+            <a:avLst/>
+          </a:prstGeom>
+          <a:solidFill xmlns:a="http://schemas.openxmlformats.org/drawingml/2006/main">
+            <a:srgbClr val="78909C"/>
+          </a:solidFill>
+          <a:ln xmlns:a="http://schemas.openxmlformats.org/drawingml/2006/main" w="0">
+            <a:solidFill>
+              <a:srgbClr val="78909C"/>
+            </a:solidFill>
+            <a:prstDash val="solid"/>
+          </a:ln>
+        </p:spPr>
+      </p:sp>
+      <p:sp>
+        <p:nvSpPr>
+          <p:cNvPr id="25" name="near">
+            <a:extLst xmlns:a="http://schemas.openxmlformats.org/drawingml/2006/main">
+              <a:ext uri="{FF2B5EF4-FFF2-40B4-BE49-F238E27FC236}">
+                <a16:creationId xmlns:a16="http://schemas.microsoft.com/office/drawing/2014/main" id="{CA407976-97C6-449F-B7D0-D58E0C7E33D3}"/>
+              </a:ext>
+            </a:extLst>
+          </p:cNvPr>
+          <p:cNvSpPr>
+            <a:spLocks xmlns:a="http://schemas.openxmlformats.org/drawingml/2006/main" noGrp="1"/>
+          </p:cNvSpPr>
+          <p:nvPr/>
+        </p:nvSpPr>
+        <p:spPr>
+          <a:xfrm xmlns:a="http://schemas.openxmlformats.org/drawingml/2006/main">
+            <a:off x="685800" y="6286500"/>
+            <a:ext cx="3048000" cy="361950"/>
+          </a:xfrm>
+          <a:prstGeom xmlns:a="http://schemas.openxmlformats.org/drawingml/2006/main" prst="rect">
+            <a:avLst/>
+          </a:prstGeom>
+          <a:noFill xmlns:a="http://schemas.openxmlformats.org/drawingml/2006/main"/>
+          <a:ln xmlns:a="http://schemas.openxmlformats.org/drawingml/2006/main" w="0">
+            <a:noFill/>
+            <a:prstDash val="solid"/>
+          </a:ln>
+        </p:spPr>
+        <p:txBody>
+          <a:bodyPr xmlns:a="http://schemas.openxmlformats.org/drawingml/2006/main" anchor="ctr"/>
+          <a:lstStyle xmlns:a="http://schemas.openxmlformats.org/drawingml/2006/main"/>
+          <a:p xmlns:a="http://schemas.openxmlformats.org/drawingml/2006/main">
+            <a:pPr algn="l">
+              <a:defRPr sz="1350" b="1">
+                <a:solidFill>
+                  <a:srgbClr val="00E6E6"/>
+                </a:solidFill>
+              </a:defRPr>
+            </a:pPr>
+            <a:r>
+              <a:rPr sz="1350" b="1">
+                <a:solidFill>
+                  <a:srgbClr val="00E6E6"/>
+                </a:solidFill>
+              </a:rPr>
+              <a:t>NEAR GAP  スリップストリーム</a:t>
+            </a:r>
+          </a:p>
+        </p:txBody>
+      </p:sp>
+      <p:sp>
+        <p:nvSpPr>
+          <p:cNvPr id="26" name="large">
+            <a:extLst xmlns:a="http://schemas.openxmlformats.org/drawingml/2006/main">
+              <a:ext uri="{FF2B5EF4-FFF2-40B4-BE49-F238E27FC236}">
+                <a16:creationId xmlns:a16="http://schemas.microsoft.com/office/drawing/2014/main" id="{614F4FBF-B605-4516-8183-DF09CE8F2DAB}"/>
+              </a:ext>
+            </a:extLst>
+          </p:cNvPr>
+          <p:cNvSpPr>
+            <a:spLocks xmlns:a="http://schemas.openxmlformats.org/drawingml/2006/main" noGrp="1"/>
+          </p:cNvSpPr>
+          <p:nvPr/>
+        </p:nvSpPr>
+        <p:spPr>
+          <a:xfrm xmlns:a="http://schemas.openxmlformats.org/drawingml/2006/main">
+            <a:off x="4191000" y="6286500"/>
+            <a:ext cx="3429000" cy="361950"/>
+          </a:xfrm>
+          <a:prstGeom xmlns:a="http://schemas.openxmlformats.org/drawingml/2006/main" prst="rect">
+            <a:avLst/>
+          </a:prstGeom>
+          <a:noFill xmlns:a="http://schemas.openxmlformats.org/drawingml/2006/main"/>
+          <a:ln xmlns:a="http://schemas.openxmlformats.org/drawingml/2006/main" w="0">
+            <a:noFill/>
+            <a:prstDash val="solid"/>
+          </a:ln>
+        </p:spPr>
+        <p:txBody>
+          <a:bodyPr xmlns:a="http://schemas.openxmlformats.org/drawingml/2006/main" anchor="ctr"/>
+          <a:lstStyle xmlns:a="http://schemas.openxmlformats.org/drawingml/2006/main"/>
+          <a:p xmlns:a="http://schemas.openxmlformats.org/drawingml/2006/main">
+            <a:pPr algn="l">
+              <a:defRPr sz="1350" b="1">
+                <a:solidFill>
+                  <a:srgbClr val="FFD34E"/>
+                </a:solidFill>
+              </a:defRPr>
+            </a:pPr>
+            <a:r>
+              <a:rPr sz="1350" b="1">
+                <a:solidFill>
+                  <a:srgbClr val="FFD34E"/>
+                </a:solidFill>
+              </a:rPr>
+              <a:t>LARGE GAP  距離連動回復</a:t>
+            </a:r>
+          </a:p>
+        </p:txBody>
+      </p:sp>
+      <p:sp>
+        <p:nvSpPr>
+          <p:cNvPr id="27" name="auto">
+            <a:extLst xmlns:a="http://schemas.openxmlformats.org/drawingml/2006/main">
+              <a:ext uri="{FF2B5EF4-FFF2-40B4-BE49-F238E27FC236}">
+                <a16:creationId xmlns:a16="http://schemas.microsoft.com/office/drawing/2014/main" id="{2F2A72AE-16CE-4605-9EE9-656CE7249D27}"/>
+              </a:ext>
+            </a:extLst>
+          </p:cNvPr>
+          <p:cNvSpPr>
+            <a:spLocks xmlns:a="http://schemas.openxmlformats.org/drawingml/2006/main" noGrp="1"/>
+          </p:cNvSpPr>
+          <p:nvPr/>
+        </p:nvSpPr>
+        <p:spPr>
+          <a:xfrm xmlns:a="http://schemas.openxmlformats.org/drawingml/2006/main">
+            <a:off x="7848600" y="6286500"/>
+            <a:ext cx="2895600" cy="361950"/>
+          </a:xfrm>
+          <a:prstGeom xmlns:a="http://schemas.openxmlformats.org/drawingml/2006/main" prst="rect">
+            <a:avLst/>
+          </a:prstGeom>
+          <a:noFill xmlns:a="http://schemas.openxmlformats.org/drawingml/2006/main"/>
+          <a:ln xmlns:a="http://schemas.openxmlformats.org/drawingml/2006/main" w="0">
+            <a:noFill/>
+            <a:prstDash val="solid"/>
+          </a:ln>
+        </p:spPr>
+        <p:txBody>
+          <a:bodyPr xmlns:a="http://schemas.openxmlformats.org/drawingml/2006/main" anchor="ctr"/>
+          <a:lstStyle xmlns:a="http://schemas.openxmlformats.org/drawingml/2006/main"/>
+          <a:p xmlns:a="http://schemas.openxmlformats.org/drawingml/2006/main">
+            <a:pPr algn="r">
+              <a:defRPr sz="1350" b="1">
+                <a:solidFill>
+                  <a:srgbClr val="FF35D3"/>
+                </a:solidFill>
+              </a:defRPr>
+            </a:pPr>
+            <a:r>
+              <a:rPr sz="1350" b="1">
+                <a:solidFill>
+                  <a:srgbClr val="FF35D3"/>
+                </a:solidFill>
+              </a:rPr>
+              <a:t>速度は自動上昇しない</a:t>
+            </a:r>
+          </a:p>
+        </p:txBody>
+      </p:sp>
+      <p:sp>
+        <p:nvSpPr>
+          <p:cNvPr id="28" name="tip">
+            <a:extLst xmlns:a="http://schemas.openxmlformats.org/drawingml/2006/main">
+              <a:ext uri="{FF2B5EF4-FFF2-40B4-BE49-F238E27FC236}">
+                <a16:creationId xmlns:a16="http://schemas.microsoft.com/office/drawing/2014/main" id="{D018FBB7-879D-454A-B4DA-446319635986}"/>
+              </a:ext>
+            </a:extLst>
+          </p:cNvPr>
+          <p:cNvSpPr>
+            <a:spLocks xmlns:a="http://schemas.openxmlformats.org/drawingml/2006/main" noGrp="1"/>
+          </p:cNvSpPr>
+          <p:nvPr/>
+        </p:nvSpPr>
+        <p:spPr>
+          <a:xfrm xmlns:a="http://schemas.openxmlformats.org/drawingml/2006/main">
+            <a:off x="1143000" y="6953250"/>
+            <a:ext cx="9144000" cy="514350"/>
+          </a:xfrm>
+          <a:prstGeom xmlns:a="http://schemas.openxmlformats.org/drawingml/2006/main" prst="rect">
+            <a:avLst/>
+          </a:prstGeom>
+          <a:noFill xmlns:a="http://schemas.openxmlformats.org/drawingml/2006/main"/>
+          <a:ln xmlns:a="http://schemas.openxmlformats.org/drawingml/2006/main" w="0">
+            <a:noFill/>
+            <a:prstDash val="solid"/>
+          </a:ln>
+        </p:spPr>
+        <p:txBody>
+          <a:bodyPr xmlns:a="http://schemas.openxmlformats.org/drawingml/2006/main" anchor="ctr"/>
+          <a:lstStyle xmlns:a="http://schemas.openxmlformats.org/drawingml/2006/main"/>
+          <a:p xmlns:a="http://schemas.openxmlformats.org/drawingml/2006/main">
+            <a:pPr algn="ctr">
+              <a:defRPr sz="1500" b="1">
+                <a:solidFill>
+                  <a:srgbClr val="F4F7FA"/>
+                </a:solidFill>
+              </a:defRPr>
+            </a:pPr>
+            <a:r>
+              <a:rPr sz="1500" b="1">
+                <a:solidFill>
+                  <a:srgbClr val="F4F7FA"/>
+                </a:solidFill>
+              </a:rPr>
+              <a:t>高輝度化を確認してからBOOSTで横へ出る。接触距離へ入ると回復は終了する。</a:t>
+            </a:r>
+          </a:p>
+        </p:txBody>
+      </p:sp>
+      <p:sp>
+        <p:nvSpPr>
+          <p:cNvPr id="29" name="footer-rule">
+            <a:extLst xmlns:a="http://schemas.openxmlformats.org/drawingml/2006/main">
+              <a:ext uri="{FF2B5EF4-FFF2-40B4-BE49-F238E27FC236}">
+                <a16:creationId xmlns:a16="http://schemas.microsoft.com/office/drawing/2014/main" id="{444CE917-BA6C-4877-98D1-D5AE35D94963}"/>
+              </a:ext>
+            </a:extLst>
+          </p:cNvPr>
+          <p:cNvSpPr>
+            <a:spLocks xmlns:a="http://schemas.openxmlformats.org/drawingml/2006/main" noGrp="1"/>
+          </p:cNvSpPr>
+          <p:nvPr/>
+        </p:nvSpPr>
+        <p:spPr>
+          <a:xfrm xmlns:a="http://schemas.openxmlformats.org/drawingml/2006/main">
+            <a:off x="609600" y="8020050"/>
+            <a:ext cx="10210800" cy="9525"/>
+          </a:xfrm>
+          <a:prstGeom xmlns:a="http://schemas.openxmlformats.org/drawingml/2006/main" prst="rect">
+            <a:avLst/>
+          </a:prstGeom>
+          <a:solidFill xmlns:a="http://schemas.openxmlformats.org/drawingml/2006/main">
+            <a:srgbClr val="78909C"/>
+          </a:solidFill>
+          <a:ln xmlns:a="http://schemas.openxmlformats.org/drawingml/2006/main" w="0">
+            <a:solidFill>
+              <a:srgbClr val="78909C"/>
+            </a:solidFill>
+            <a:prstDash val="solid"/>
+          </a:ln>
+        </p:spPr>
+      </p:sp>
+      <p:sp>
+        <p:nvSpPr>
+          <p:cNvPr id="30" name="footer-left">
+            <a:extLst xmlns:a="http://schemas.openxmlformats.org/drawingml/2006/main">
+              <a:ext uri="{FF2B5EF4-FFF2-40B4-BE49-F238E27FC236}">
+                <a16:creationId xmlns:a16="http://schemas.microsoft.com/office/drawing/2014/main" id="{6D125CA4-5041-40D4-A429-5949CDBB0267}"/>
+              </a:ext>
+            </a:extLst>
+          </p:cNvPr>
+          <p:cNvSpPr>
+            <a:spLocks xmlns:a="http://schemas.openxmlformats.org/drawingml/2006/main" noGrp="1"/>
+          </p:cNvSpPr>
+          <p:nvPr/>
+        </p:nvSpPr>
+        <p:spPr>
+          <a:xfrm xmlns:a="http://schemas.openxmlformats.org/drawingml/2006/main">
+            <a:off x="609600" y="8096250"/>
+            <a:ext cx="2857500" cy="285750"/>
+          </a:xfrm>
+          <a:prstGeom xmlns:a="http://schemas.openxmlformats.org/drawingml/2006/main" prst="rect">
+            <a:avLst/>
+          </a:prstGeom>
+          <a:noFill xmlns:a="http://schemas.openxmlformats.org/drawingml/2006/main"/>
+          <a:ln xmlns:a="http://schemas.openxmlformats.org/drawingml/2006/main" w="0">
+            <a:noFill/>
+            <a:prstDash val="solid"/>
+          </a:ln>
+        </p:spPr>
+        <p:txBody>
+          <a:bodyPr xmlns:a="http://schemas.openxmlformats.org/drawingml/2006/main" anchor="ctr"/>
+          <a:lstStyle xmlns:a="http://schemas.openxmlformats.org/drawingml/2006/main"/>
+          <a:p xmlns:a="http://schemas.openxmlformats.org/drawingml/2006/main">
+            <a:pPr algn="l">
+              <a:defRPr sz="975" b="1">
+                <a:solidFill>
+                  <a:srgbClr val="78909C"/>
+                </a:solidFill>
+              </a:defRPr>
+            </a:pPr>
+            <a:r>
+              <a:rPr sz="975" b="1">
+                <a:solidFill>
+                  <a:srgbClr val="78909C"/>
+                </a:solidFill>
+              </a:rPr>
+              <a:t>WIRE DRIFT RACERS</a:t>
+            </a:r>
+          </a:p>
+        </p:txBody>
+      </p:sp>
+      <p:sp>
+        <p:nvSpPr>
+          <p:cNvPr id="31" name="footer-right">
+            <a:extLst xmlns:a="http://schemas.openxmlformats.org/drawingml/2006/main">
+              <a:ext uri="{FF2B5EF4-FFF2-40B4-BE49-F238E27FC236}">
+                <a16:creationId xmlns:a16="http://schemas.microsoft.com/office/drawing/2014/main" id="{3E3C6696-9A0E-4417-A3CF-D9C2B4CB696A}"/>
+              </a:ext>
+            </a:extLst>
+          </p:cNvPr>
+          <p:cNvSpPr>
+            <a:spLocks xmlns:a="http://schemas.openxmlformats.org/drawingml/2006/main" noGrp="1"/>
+          </p:cNvSpPr>
+          <p:nvPr/>
+        </p:nvSpPr>
+        <p:spPr>
+          <a:xfrm xmlns:a="http://schemas.openxmlformats.org/drawingml/2006/main">
+            <a:off x="7810500" y="8096250"/>
+            <a:ext cx="3009900" cy="285750"/>
+          </a:xfrm>
+          <a:prstGeom xmlns:a="http://schemas.openxmlformats.org/drawingml/2006/main" prst="rect">
+            <a:avLst/>
+          </a:prstGeom>
+          <a:noFill xmlns:a="http://schemas.openxmlformats.org/drawingml/2006/main"/>
+          <a:ln xmlns:a="http://schemas.openxmlformats.org/drawingml/2006/main" w="0">
+            <a:noFill/>
+            <a:prstDash val="solid"/>
+          </a:ln>
+        </p:spPr>
+        <p:txBody>
+          <a:bodyPr xmlns:a="http://schemas.openxmlformats.org/drawingml/2006/main" anchor="ctr"/>
+          <a:lstStyle xmlns:a="http://schemas.openxmlformats.org/drawingml/2006/main"/>
+          <a:p xmlns:a="http://schemas.openxmlformats.org/drawingml/2006/main">
+            <a:pPr algn="r">
+              <a:defRPr sz="975" b="0">
+                <a:solidFill>
+                  <a:srgbClr val="78909C"/>
+                </a:solidFill>
+              </a:defRPr>
+            </a:pPr>
+            <a:r>
+              <a:rPr sz="975" b="0">
+                <a:solidFill>
+                  <a:srgbClr val="78909C"/>
+                </a:solidFill>
+              </a:rPr>
+              <a:t>X68000 / 3 LAPS / 2 CARS</a:t>
+            </a:r>
+          </a:p>
+        </p:txBody>
+      </p:sp>
+    </p:spTree>
+    <p:extLst>
+      <p:ext uri="{BB962C8B-B14F-4D97-AF65-F5344CB8AC3E}">
+        <p14:creationId xmlns:p14="http://schemas.microsoft.com/office/powerpoint/2010/main" val="2040896425"/>
+      </p:ext>
+    </p:extLst>
+  </p:cSld>
+</p:sld>
+</file>
+
+<file path=ppt/slides/slide17.xml><?xml version="1.0" encoding="utf-8"?>
+<p:sld xmlns:p="http://schemas.openxmlformats.org/presentationml/2006/main">
+  <p:cSld>
     <p:bg>
       <p:bgPr>
         <a:solidFill xmlns:a="http://schemas.openxmlformats.org/drawingml/2006/main">
@@ -16531,6 +18045,7 @@
           <a:lstStyle xmlns:a="http://schemas.openxmlformats.org/drawingml/2006/main"/>
           <a:p xmlns:a="http://schemas.openxmlformats.org/drawingml/2006/main">
             <a:pPr algn="l">
+              <a:buNone/>
               <a:defRPr sz="1350" b="1">
                 <a:solidFill>
                   <a:srgbClr val="00E6E6"/>
@@ -16614,6 +18129,7 @@
           <a:lstStyle xmlns:a="http://schemas.openxmlformats.org/drawingml/2006/main"/>
           <a:p xmlns:a="http://schemas.openxmlformats.org/drawingml/2006/main">
             <a:pPr algn="l">
+              <a:buNone/>
               <a:defRPr sz="2700" b="1">
                 <a:solidFill>
                   <a:srgbClr val="F4F7FA"/>
@@ -16792,6 +18308,7 @@
           <a:lstStyle xmlns:a="http://schemas.openxmlformats.org/drawingml/2006/main"/>
           <a:p xmlns:a="http://schemas.openxmlformats.org/drawingml/2006/main">
             <a:pPr algn="ctr">
+              <a:buNone/>
               <a:defRPr sz="2400" b="1">
                 <a:solidFill>
                   <a:srgbClr val="00E6E6"/>
@@ -16842,6 +18359,7 @@
           <a:lstStyle xmlns:a="http://schemas.openxmlformats.org/drawingml/2006/main"/>
           <a:p xmlns:a="http://schemas.openxmlformats.org/drawingml/2006/main">
             <a:pPr algn="ctr">
+              <a:buNone/>
               <a:defRPr sz="1500" b="0">
                 <a:solidFill>
                   <a:srgbClr val="F4F7FA"/>
@@ -16859,6 +18377,7 @@
           </a:p>
           <a:p xmlns:a="http://schemas.openxmlformats.org/drawingml/2006/main">
             <a:pPr algn="ctr">
+              <a:buNone/>
               <a:defRPr sz="1500" b="0">
                 <a:solidFill>
                   <a:srgbClr val="F4F7FA"/>
@@ -16971,6 +18490,7 @@
           <a:lstStyle xmlns:a="http://schemas.openxmlformats.org/drawingml/2006/main"/>
           <a:p xmlns:a="http://schemas.openxmlformats.org/drawingml/2006/main">
             <a:pPr algn="ctr">
+              <a:buNone/>
               <a:defRPr sz="2400" b="1">
                 <a:solidFill>
                   <a:srgbClr val="F4F7FA"/>
@@ -17021,6 +18541,7 @@
           <a:lstStyle xmlns:a="http://schemas.openxmlformats.org/drawingml/2006/main"/>
           <a:p xmlns:a="http://schemas.openxmlformats.org/drawingml/2006/main">
             <a:pPr algn="ctr">
+              <a:buNone/>
               <a:defRPr sz="1500" b="0">
                 <a:solidFill>
                   <a:srgbClr val="F4F7FA"/>
@@ -17038,6 +18559,7 @@
           </a:p>
           <a:p xmlns:a="http://schemas.openxmlformats.org/drawingml/2006/main">
             <a:pPr algn="ctr">
+              <a:buNone/>
               <a:defRPr sz="1500" b="0">
                 <a:solidFill>
                   <a:srgbClr val="F4F7FA"/>
@@ -17150,6 +18672,7 @@
           <a:lstStyle xmlns:a="http://schemas.openxmlformats.org/drawingml/2006/main"/>
           <a:p xmlns:a="http://schemas.openxmlformats.org/drawingml/2006/main">
             <a:pPr algn="ctr">
+              <a:buNone/>
               <a:defRPr sz="2400" b="1">
                 <a:solidFill>
                   <a:srgbClr val="FF35D3"/>
@@ -17200,6 +18723,7 @@
           <a:lstStyle xmlns:a="http://schemas.openxmlformats.org/drawingml/2006/main"/>
           <a:p xmlns:a="http://schemas.openxmlformats.org/drawingml/2006/main">
             <a:pPr algn="ctr">
+              <a:buNone/>
               <a:defRPr sz="1500" b="0">
                 <a:solidFill>
                   <a:srgbClr val="F4F7FA"/>
@@ -17217,6 +18741,7 @@
           </a:p>
           <a:p xmlns:a="http://schemas.openxmlformats.org/drawingml/2006/main">
             <a:pPr algn="ctr">
+              <a:buNone/>
               <a:defRPr sz="1500" b="0">
                 <a:solidFill>
                   <a:srgbClr val="F4F7FA"/>
@@ -17300,6 +18825,7 @@
           <a:lstStyle xmlns:a="http://schemas.openxmlformats.org/drawingml/2006/main"/>
           <a:p xmlns:a="http://schemas.openxmlformats.org/drawingml/2006/main">
             <a:pPr algn="ctr">
+              <a:buNone/>
               <a:defRPr sz="1500" b="1">
                 <a:solidFill>
                   <a:srgbClr val="F4F7FA"/>
@@ -17350,6 +18876,7 @@
           <a:lstStyle xmlns:a="http://schemas.openxmlformats.org/drawingml/2006/main"/>
           <a:p xmlns:a="http://schemas.openxmlformats.org/drawingml/2006/main">
             <a:pPr algn="ctr">
+              <a:buNone/>
               <a:defRPr sz="1275" b="0">
                 <a:solidFill>
                   <a:srgbClr val="78909C"/>
@@ -17362,7 +18889,15 @@
                   <a:srgbClr val="78909C"/>
                 </a:solidFill>
               </a:rPr>
-              <a:t>全コース共通: 3 LAPS / 同一車両物理 / ACTIVE GATE / CATCH-UP BOOST</a:t>
+              <a:t>全コース共通: 3 LAPS / 同一車両物理 / ACTIVE GATE / </a:t>
+            </a:r>
+            <a:r>
+              <a:rPr sz="1275" b="0">
+                <a:solidFill>
+                  <a:srgbClr val="78909C"/>
+                </a:solidFill>
+              </a:rPr>
+              <a:t>SLIPSTREAM + CATCH-UP</a:t>
             </a:r>
           </a:p>
         </p:txBody>
@@ -17433,6 +18968,7 @@
           <a:lstStyle xmlns:a="http://schemas.openxmlformats.org/drawingml/2006/main"/>
           <a:p xmlns:a="http://schemas.openxmlformats.org/drawingml/2006/main">
             <a:pPr algn="l">
+              <a:buNone/>
               <a:defRPr sz="975" b="1">
                 <a:solidFill>
                   <a:srgbClr val="78909C"/>
@@ -17483,6 +19019,7 @@
           <a:lstStyle xmlns:a="http://schemas.openxmlformats.org/drawingml/2006/main"/>
           <a:p xmlns:a="http://schemas.openxmlformats.org/drawingml/2006/main">
             <a:pPr algn="r">
+              <a:buNone/>
               <a:defRPr sz="975" b="0">
                 <a:solidFill>
                   <a:srgbClr val="78909C"/>

--- a/doc/manual-ja.pptx
+++ b/doc/manual-ja.pptx
@@ -2,29 +2,29 @@
 <file path=ppt/presentation.xml><?xml version="1.0" encoding="utf-8"?>
 <p:presentation xmlns:p="http://schemas.openxmlformats.org/presentationml/2006/main">
   <p:sldMasterIdLst>
-    <p:sldMasterId xmlns:r="http://schemas.openxmlformats.org/officeDocument/2006/relationships" id="2147483648" r:id="R48ee10eddd97413e"/>
+    <p:sldMasterId xmlns:r="http://schemas.openxmlformats.org/officeDocument/2006/relationships" id="2147483648" r:id="R3bda155fa2e849e3"/>
   </p:sldMasterIdLst>
   <p:notesMasterIdLst>
-    <p:notesMasterId xmlns:r="http://schemas.openxmlformats.org/officeDocument/2006/relationships" r:id="Rcac3680fa8e34e0f"/>
+    <p:notesMasterId xmlns:r="http://schemas.openxmlformats.org/officeDocument/2006/relationships" r:id="R4b26e823a4504019"/>
   </p:notesMasterIdLst>
   <p:sldIdLst>
-    <p:sldId xmlns:r="http://schemas.openxmlformats.org/officeDocument/2006/relationships" id="256" r:id="R4331ef6d1dc74b14"/>
-    <p:sldId xmlns:r="http://schemas.openxmlformats.org/officeDocument/2006/relationships" id="257" r:id="Rbfa5c015a558420f"/>
-    <p:sldId xmlns:r="http://schemas.openxmlformats.org/officeDocument/2006/relationships" id="258" r:id="R43d58c86a7f846fd"/>
-    <p:sldId xmlns:r="http://schemas.openxmlformats.org/officeDocument/2006/relationships" id="259" r:id="R8a5846eabd8241d2"/>
-    <p:sldId xmlns:r="http://schemas.openxmlformats.org/officeDocument/2006/relationships" id="260" r:id="Ra6dedc8929784ae4"/>
-    <p:sldId xmlns:r="http://schemas.openxmlformats.org/officeDocument/2006/relationships" id="261" r:id="R5920597a4b854ea7"/>
-    <p:sldId xmlns:r="http://schemas.openxmlformats.org/officeDocument/2006/relationships" id="262" r:id="R0cb80598417f4356"/>
-    <p:sldId xmlns:r="http://schemas.openxmlformats.org/officeDocument/2006/relationships" id="263" r:id="Ra81278da143c4368"/>
-    <p:sldId xmlns:r="http://schemas.openxmlformats.org/officeDocument/2006/relationships" id="264" r:id="R736aacec548240b5"/>
-    <p:sldId xmlns:r="http://schemas.openxmlformats.org/officeDocument/2006/relationships" id="265" r:id="Re1ab55a74c9d4120"/>
-    <p:sldId xmlns:r="http://schemas.openxmlformats.org/officeDocument/2006/relationships" id="266" r:id="R74730cae4f884115"/>
-    <p:sldId xmlns:r="http://schemas.openxmlformats.org/officeDocument/2006/relationships" id="267" r:id="Rb0f1e38ad1e84937"/>
-    <p:sldId xmlns:r="http://schemas.openxmlformats.org/officeDocument/2006/relationships" id="268" r:id="R0ddd131360f9442f"/>
-    <p:sldId xmlns:r="http://schemas.openxmlformats.org/officeDocument/2006/relationships" id="269" r:id="R8c5bd682c607429f"/>
-    <p:sldId xmlns:r="http://schemas.openxmlformats.org/officeDocument/2006/relationships" id="270" r:id="Rea65c33546e9409b"/>
-    <p:sldId xmlns:r="http://schemas.openxmlformats.org/officeDocument/2006/relationships" id="271" r:id="Rf0bdee969c104f55"/>
-    <p:sldId xmlns:r="http://schemas.openxmlformats.org/officeDocument/2006/relationships" id="272" r:id="R2abd98d1ed294542"/>
+    <p:sldId xmlns:r="http://schemas.openxmlformats.org/officeDocument/2006/relationships" id="256" r:id="R8f2cb37808be4240"/>
+    <p:sldId xmlns:r="http://schemas.openxmlformats.org/officeDocument/2006/relationships" id="257" r:id="Rad30d4f7936140cd"/>
+    <p:sldId xmlns:r="http://schemas.openxmlformats.org/officeDocument/2006/relationships" id="258" r:id="Rc922ed015abc4192"/>
+    <p:sldId xmlns:r="http://schemas.openxmlformats.org/officeDocument/2006/relationships" id="259" r:id="R07c4c9dd35a54c31"/>
+    <p:sldId xmlns:r="http://schemas.openxmlformats.org/officeDocument/2006/relationships" id="260" r:id="R20e75f489792484f"/>
+    <p:sldId xmlns:r="http://schemas.openxmlformats.org/officeDocument/2006/relationships" id="261" r:id="Rf78075ffc4fc4f98"/>
+    <p:sldId xmlns:r="http://schemas.openxmlformats.org/officeDocument/2006/relationships" id="262" r:id="Re442a62388a14aef"/>
+    <p:sldId xmlns:r="http://schemas.openxmlformats.org/officeDocument/2006/relationships" id="263" r:id="Rd3025e6abd53480f"/>
+    <p:sldId xmlns:r="http://schemas.openxmlformats.org/officeDocument/2006/relationships" id="264" r:id="R89e0263a9fae4d59"/>
+    <p:sldId xmlns:r="http://schemas.openxmlformats.org/officeDocument/2006/relationships" id="265" r:id="R02005accb33d4986"/>
+    <p:sldId xmlns:r="http://schemas.openxmlformats.org/officeDocument/2006/relationships" id="266" r:id="Rab8635f3df74450c"/>
+    <p:sldId xmlns:r="http://schemas.openxmlformats.org/officeDocument/2006/relationships" id="267" r:id="R9baefe4aac4a4340"/>
+    <p:sldId xmlns:r="http://schemas.openxmlformats.org/officeDocument/2006/relationships" id="268" r:id="R9022c30be6234737"/>
+    <p:sldId xmlns:r="http://schemas.openxmlformats.org/officeDocument/2006/relationships" id="269" r:id="R7022e1712ce64fbc"/>
+    <p:sldId xmlns:r="http://schemas.openxmlformats.org/officeDocument/2006/relationships" id="270" r:id="R69976843b83147f4"/>
+    <p:sldId xmlns:r="http://schemas.openxmlformats.org/officeDocument/2006/relationships" id="271" r:id="R18477e5276e34451"/>
+    <p:sldId xmlns:r="http://schemas.openxmlformats.org/officeDocument/2006/relationships" id="272" r:id="R80282da85f8d44c2"/>
   </p:sldIdLst>
   <p:sldSz cx="11430000" cy="8572500"/>
   <p:notesSz cx="6858000" cy="9144000"/>
@@ -1578,7 +1578,7 @@
   </p:cSld>
   <p:clrMap bg1="lt1" tx1="dk1" bg2="lt2" tx2="dk2" accent1="accent1" accent2="accent2" accent3="accent3" accent4="accent4" accent5="accent5" accent6="accent6" hlink="hlink" folHlink="folHlink"/>
   <p:sldLayoutIdLst>
-    <p:sldLayoutId xmlns:r="http://schemas.openxmlformats.org/officeDocument/2006/relationships" id="2147483649" r:id="Ra6ea0adddd59476c"/>
+    <p:sldLayoutId xmlns:r="http://schemas.openxmlformats.org/officeDocument/2006/relationships" id="2147483649" r:id="Rba3a2bdb25ee4cf1"/>
   </p:sldLayoutIdLst>
   <p:txStyles>
     <p:titleStyle>
@@ -4151,7 +4151,7 @@
                   <a:srgbClr val="F3FBFF"/>
                 </a:solidFill>
               </a:rPr>
-              <a:t>近距離では同じレーンを約0.5秒追走するとBOOST回復。大差時は距離連動回復。どちらも自動加速ではない。</a:t>
+              <a:t>近距離では同じレーンで約0.3秒追走し、DRAFTからSLIPへ移行。毎更新12回復し、自動加速はしない。</a:t>
             </a:r>
           </a:p>
         </p:txBody>
@@ -4469,6 +4469,7 @@
           <a:lstStyle xmlns:a="http://schemas.openxmlformats.org/drawingml/2006/main"/>
           <a:p xmlns:a="http://schemas.openxmlformats.org/drawingml/2006/main">
             <a:pPr algn="l">
+              <a:buNone/>
               <a:defRPr sz="1725" b="1">
                 <a:solidFill>
                   <a:srgbClr val="00E6E6"/>
@@ -11077,6 +11078,7 @@
           <a:lstStyle xmlns:a="http://schemas.openxmlformats.org/drawingml/2006/main"/>
           <a:p xmlns:a="http://schemas.openxmlformats.org/drawingml/2006/main">
             <a:pPr algn="l">
+              <a:buNone/>
               <a:defRPr sz="1350" b="1">
                 <a:solidFill>
                   <a:srgbClr val="FF35D3"/>
@@ -11160,6 +11162,7 @@
           <a:lstStyle xmlns:a="http://schemas.openxmlformats.org/drawingml/2006/main"/>
           <a:p xmlns:a="http://schemas.openxmlformats.org/drawingml/2006/main">
             <a:pPr algn="l">
+              <a:buNone/>
               <a:defRPr sz="2700" b="1">
                 <a:solidFill>
                   <a:srgbClr val="F4F7FA"/>
@@ -11272,6 +11275,7 @@
           <a:lstStyle xmlns:a="http://schemas.openxmlformats.org/drawingml/2006/main"/>
           <a:p xmlns:a="http://schemas.openxmlformats.org/drawingml/2006/main">
             <a:pPr algn="ctr">
+              <a:buNone/>
               <a:defRPr sz="1275" b="1">
                 <a:solidFill>
                   <a:srgbClr val="4B7DFF"/>
@@ -11322,6 +11326,7 @@
           <a:lstStyle xmlns:a="http://schemas.openxmlformats.org/drawingml/2006/main"/>
           <a:p xmlns:a="http://schemas.openxmlformats.org/drawingml/2006/main">
             <a:pPr algn="ctr">
+              <a:buNone/>
               <a:defRPr sz="1275" b="1">
                 <a:solidFill>
                   <a:srgbClr val="FF506A"/>
@@ -11438,6 +11443,7 @@
           <a:lstStyle xmlns:a="http://schemas.openxmlformats.org/drawingml/2006/main"/>
           <a:p xmlns:a="http://schemas.openxmlformats.org/drawingml/2006/main">
             <a:pPr algn="l">
+              <a:buNone/>
               <a:defRPr sz="1650" b="1">
                 <a:solidFill>
                   <a:srgbClr val="00E6E6"/>
@@ -11521,6 +11527,7 @@
           <a:lstStyle xmlns:a="http://schemas.openxmlformats.org/drawingml/2006/main"/>
           <a:p xmlns:a="http://schemas.openxmlformats.org/drawingml/2006/main">
             <a:pPr algn="l">
+              <a:buNone/>
               <a:defRPr sz="1725" b="1">
                 <a:solidFill>
                   <a:srgbClr val="00E6E6"/>
@@ -11571,6 +11578,7 @@
           <a:lstStyle xmlns:a="http://schemas.openxmlformats.org/drawingml/2006/main"/>
           <a:p xmlns:a="http://schemas.openxmlformats.org/drawingml/2006/main">
             <a:pPr algn="l">
+              <a:buNone/>
               <a:defRPr sz="1425" b="0">
                 <a:solidFill>
                   <a:srgbClr val="F4F7FA"/>
@@ -11621,6 +11629,7 @@
           <a:lstStyle xmlns:a="http://schemas.openxmlformats.org/drawingml/2006/main"/>
           <a:p xmlns:a="http://schemas.openxmlformats.org/drawingml/2006/main">
             <a:pPr algn="l">
+              <a:buNone/>
               <a:defRPr sz="1650" b="1">
                 <a:solidFill>
                   <a:srgbClr val="FFD34E"/>
@@ -11704,6 +11713,7 @@
           <a:lstStyle xmlns:a="http://schemas.openxmlformats.org/drawingml/2006/main"/>
           <a:p xmlns:a="http://schemas.openxmlformats.org/drawingml/2006/main">
             <a:pPr algn="l">
+              <a:buNone/>
               <a:defRPr sz="1725" b="1">
                 <a:solidFill>
                   <a:srgbClr val="FFD34E"/>
@@ -11716,7 +11726,7 @@
                   <a:srgbClr val="FFD34E"/>
                 </a:solidFill>
               </a:rPr>
-              <a:t>HOLD / 約0.5秒</a:t>
+              <a:t>HOLD / 約0.3秒</a:t>
             </a:r>
           </a:p>
         </p:txBody>
@@ -11754,6 +11764,7 @@
           <a:lstStyle xmlns:a="http://schemas.openxmlformats.org/drawingml/2006/main"/>
           <a:p xmlns:a="http://schemas.openxmlformats.org/drawingml/2006/main">
             <a:pPr algn="l">
+              <a:buNone/>
               <a:defRPr sz="1425" b="0">
                 <a:solidFill>
                   <a:srgbClr val="F4F7FA"/>
@@ -11766,7 +11777,7 @@
                   <a:srgbClr val="F4F7FA"/>
                 </a:solidFill>
               </a:rPr>
-              <a:t>10回の固定更新を維持して成立</a:t>
+              <a:t>DRAFTを6回の固定更新でSLIPへ</a:t>
             </a:r>
           </a:p>
         </p:txBody>
@@ -11804,6 +11815,7 @@
           <a:lstStyle xmlns:a="http://schemas.openxmlformats.org/drawingml/2006/main"/>
           <a:p xmlns:a="http://schemas.openxmlformats.org/drawingml/2006/main">
             <a:pPr algn="l">
+              <a:buNone/>
               <a:defRPr sz="1650" b="1">
                 <a:solidFill>
                   <a:srgbClr val="FF35D3"/>
@@ -11887,6 +11899,7 @@
           <a:lstStyle xmlns:a="http://schemas.openxmlformats.org/drawingml/2006/main"/>
           <a:p xmlns:a="http://schemas.openxmlformats.org/drawingml/2006/main">
             <a:pPr algn="l">
+              <a:buNone/>
               <a:defRPr sz="1725" b="1">
                 <a:solidFill>
                   <a:srgbClr val="FF35D3"/>
@@ -11937,6 +11950,7 @@
           <a:lstStyle xmlns:a="http://schemas.openxmlformats.org/drawingml/2006/main"/>
           <a:p xmlns:a="http://schemas.openxmlformats.org/drawingml/2006/main">
             <a:pPr algn="l">
+              <a:buNone/>
               <a:defRPr sz="1425" b="0">
                 <a:solidFill>
                   <a:srgbClr val="F4F7FA"/>
@@ -11949,7 +11963,7 @@
                   <a:srgbClr val="F4F7FA"/>
                 </a:solidFill>
               </a:rPr>
-              <a:t>成立中は毎更新8回復し車体が高輝度化</a:t>
+              <a:t>毎更新12回復・車体と後部ラインが点滅</a:t>
             </a:r>
           </a:p>
         </p:txBody>
@@ -12020,6 +12034,7 @@
           <a:lstStyle xmlns:a="http://schemas.openxmlformats.org/drawingml/2006/main"/>
           <a:p xmlns:a="http://schemas.openxmlformats.org/drawingml/2006/main">
             <a:pPr algn="l">
+              <a:buNone/>
               <a:defRPr sz="1350" b="1">
                 <a:solidFill>
                   <a:srgbClr val="00E6E6"/>
@@ -12032,7 +12047,7 @@
                   <a:srgbClr val="00E6E6"/>
                 </a:solidFill>
               </a:rPr>
-              <a:t>NEAR GAP  スリップストリーム</a:t>
+              <a:t>NEAR GAP  DRAFT &gt; SLIP</a:t>
             </a:r>
           </a:p>
         </p:txBody>
@@ -12070,6 +12085,7 @@
           <a:lstStyle xmlns:a="http://schemas.openxmlformats.org/drawingml/2006/main"/>
           <a:p xmlns:a="http://schemas.openxmlformats.org/drawingml/2006/main">
             <a:pPr algn="l">
+              <a:buNone/>
               <a:defRPr sz="1350" b="1">
                 <a:solidFill>
                   <a:srgbClr val="FFD34E"/>
@@ -12120,6 +12136,7 @@
           <a:lstStyle xmlns:a="http://schemas.openxmlformats.org/drawingml/2006/main"/>
           <a:p xmlns:a="http://schemas.openxmlformats.org/drawingml/2006/main">
             <a:pPr algn="r">
+              <a:buNone/>
               <a:defRPr sz="1350" b="1">
                 <a:solidFill>
                   <a:srgbClr val="FF35D3"/>
@@ -12170,6 +12187,7 @@
           <a:lstStyle xmlns:a="http://schemas.openxmlformats.org/drawingml/2006/main"/>
           <a:p xmlns:a="http://schemas.openxmlformats.org/drawingml/2006/main">
             <a:pPr algn="ctr">
+              <a:buNone/>
               <a:defRPr sz="1500" b="1">
                 <a:solidFill>
                   <a:srgbClr val="F4F7FA"/>
@@ -12182,7 +12200,7 @@
                   <a:srgbClr val="F4F7FA"/>
                 </a:solidFill>
               </a:rPr>
-              <a:t>高輝度化を確認してからBOOSTで横へ出る。接触距離へ入ると回復は終了する。</a:t>
+              <a:t>DRAFTを維持し、SLIP点滅後にBOOSTで追い越す。別レーン・1/8周外・接触距離で終了。</a:t>
             </a:r>
           </a:p>
         </p:txBody>
@@ -12253,6 +12271,7 @@
           <a:lstStyle xmlns:a="http://schemas.openxmlformats.org/drawingml/2006/main"/>
           <a:p xmlns:a="http://schemas.openxmlformats.org/drawingml/2006/main">
             <a:pPr algn="l">
+              <a:buNone/>
               <a:defRPr sz="975" b="1">
                 <a:solidFill>
                   <a:srgbClr val="78909C"/>
@@ -12303,6 +12322,7 @@
           <a:lstStyle xmlns:a="http://schemas.openxmlformats.org/drawingml/2006/main"/>
           <a:p xmlns:a="http://schemas.openxmlformats.org/drawingml/2006/main">
             <a:pPr algn="r">
+              <a:buNone/>
               <a:defRPr sz="975" b="0">
                 <a:solidFill>
                   <a:srgbClr val="78909C"/>

--- a/doc/manual-ja.pptx
+++ b/doc/manual-ja.pptx
@@ -2,29 +2,29 @@
 <file path=ppt/presentation.xml><?xml version="1.0" encoding="utf-8"?>
 <p:presentation xmlns:p="http://schemas.openxmlformats.org/presentationml/2006/main">
   <p:sldMasterIdLst>
-    <p:sldMasterId xmlns:r="http://schemas.openxmlformats.org/officeDocument/2006/relationships" id="2147483648" r:id="R3bda155fa2e849e3"/>
+    <p:sldMasterId xmlns:r="http://schemas.openxmlformats.org/officeDocument/2006/relationships" id="2147483648" r:id="R9be9bd9eebb3408a"/>
   </p:sldMasterIdLst>
   <p:notesMasterIdLst>
-    <p:notesMasterId xmlns:r="http://schemas.openxmlformats.org/officeDocument/2006/relationships" r:id="R4b26e823a4504019"/>
+    <p:notesMasterId xmlns:r="http://schemas.openxmlformats.org/officeDocument/2006/relationships" r:id="R2c7dc4c2e2474ba5"/>
   </p:notesMasterIdLst>
   <p:sldIdLst>
-    <p:sldId xmlns:r="http://schemas.openxmlformats.org/officeDocument/2006/relationships" id="256" r:id="R8f2cb37808be4240"/>
-    <p:sldId xmlns:r="http://schemas.openxmlformats.org/officeDocument/2006/relationships" id="257" r:id="Rad30d4f7936140cd"/>
-    <p:sldId xmlns:r="http://schemas.openxmlformats.org/officeDocument/2006/relationships" id="258" r:id="Rc922ed015abc4192"/>
-    <p:sldId xmlns:r="http://schemas.openxmlformats.org/officeDocument/2006/relationships" id="259" r:id="R07c4c9dd35a54c31"/>
-    <p:sldId xmlns:r="http://schemas.openxmlformats.org/officeDocument/2006/relationships" id="260" r:id="R20e75f489792484f"/>
-    <p:sldId xmlns:r="http://schemas.openxmlformats.org/officeDocument/2006/relationships" id="261" r:id="Rf78075ffc4fc4f98"/>
-    <p:sldId xmlns:r="http://schemas.openxmlformats.org/officeDocument/2006/relationships" id="262" r:id="Re442a62388a14aef"/>
-    <p:sldId xmlns:r="http://schemas.openxmlformats.org/officeDocument/2006/relationships" id="263" r:id="Rd3025e6abd53480f"/>
-    <p:sldId xmlns:r="http://schemas.openxmlformats.org/officeDocument/2006/relationships" id="264" r:id="R89e0263a9fae4d59"/>
-    <p:sldId xmlns:r="http://schemas.openxmlformats.org/officeDocument/2006/relationships" id="265" r:id="R02005accb33d4986"/>
-    <p:sldId xmlns:r="http://schemas.openxmlformats.org/officeDocument/2006/relationships" id="266" r:id="Rab8635f3df74450c"/>
-    <p:sldId xmlns:r="http://schemas.openxmlformats.org/officeDocument/2006/relationships" id="267" r:id="R9baefe4aac4a4340"/>
-    <p:sldId xmlns:r="http://schemas.openxmlformats.org/officeDocument/2006/relationships" id="268" r:id="R9022c30be6234737"/>
-    <p:sldId xmlns:r="http://schemas.openxmlformats.org/officeDocument/2006/relationships" id="269" r:id="R7022e1712ce64fbc"/>
-    <p:sldId xmlns:r="http://schemas.openxmlformats.org/officeDocument/2006/relationships" id="270" r:id="R69976843b83147f4"/>
-    <p:sldId xmlns:r="http://schemas.openxmlformats.org/officeDocument/2006/relationships" id="271" r:id="R18477e5276e34451"/>
-    <p:sldId xmlns:r="http://schemas.openxmlformats.org/officeDocument/2006/relationships" id="272" r:id="R80282da85f8d44c2"/>
+    <p:sldId xmlns:r="http://schemas.openxmlformats.org/officeDocument/2006/relationships" id="256" r:id="Rfa9e9873a31b4000"/>
+    <p:sldId xmlns:r="http://schemas.openxmlformats.org/officeDocument/2006/relationships" id="257" r:id="R79be72ca44494f48"/>
+    <p:sldId xmlns:r="http://schemas.openxmlformats.org/officeDocument/2006/relationships" id="258" r:id="R5104a2f644d24d9c"/>
+    <p:sldId xmlns:r="http://schemas.openxmlformats.org/officeDocument/2006/relationships" id="259" r:id="Ra6610c61d4b7452f"/>
+    <p:sldId xmlns:r="http://schemas.openxmlformats.org/officeDocument/2006/relationships" id="260" r:id="R0d74a54757704960"/>
+    <p:sldId xmlns:r="http://schemas.openxmlformats.org/officeDocument/2006/relationships" id="261" r:id="Re229b97342dc4b28"/>
+    <p:sldId xmlns:r="http://schemas.openxmlformats.org/officeDocument/2006/relationships" id="262" r:id="R98a300353b454ded"/>
+    <p:sldId xmlns:r="http://schemas.openxmlformats.org/officeDocument/2006/relationships" id="263" r:id="R329533e370e446da"/>
+    <p:sldId xmlns:r="http://schemas.openxmlformats.org/officeDocument/2006/relationships" id="264" r:id="Rf84095de3bcf4b77"/>
+    <p:sldId xmlns:r="http://schemas.openxmlformats.org/officeDocument/2006/relationships" id="265" r:id="Rd30cb313bf1f4b89"/>
+    <p:sldId xmlns:r="http://schemas.openxmlformats.org/officeDocument/2006/relationships" id="266" r:id="Rad5a274c94bf42d3"/>
+    <p:sldId xmlns:r="http://schemas.openxmlformats.org/officeDocument/2006/relationships" id="267" r:id="R5b391acc796c4c42"/>
+    <p:sldId xmlns:r="http://schemas.openxmlformats.org/officeDocument/2006/relationships" id="268" r:id="R96adbed455a74b8e"/>
+    <p:sldId xmlns:r="http://schemas.openxmlformats.org/officeDocument/2006/relationships" id="269" r:id="R17b8214569eb4554"/>
+    <p:sldId xmlns:r="http://schemas.openxmlformats.org/officeDocument/2006/relationships" id="270" r:id="Raa5a54ac0b854a64"/>
+    <p:sldId xmlns:r="http://schemas.openxmlformats.org/officeDocument/2006/relationships" id="271" r:id="R83b92fc4e2a24e79"/>
+    <p:sldId xmlns:r="http://schemas.openxmlformats.org/officeDocument/2006/relationships" id="272" r:id="R6c7ccf28ec1a41d1"/>
   </p:sldIdLst>
   <p:sldSz cx="11430000" cy="8572500"/>
   <p:notesSz cx="6858000" cy="9144000"/>
@@ -1578,7 +1578,7 @@
   </p:cSld>
   <p:clrMap bg1="lt1" tx1="dk1" bg2="lt2" tx2="dk2" accent1="accent1" accent2="accent2" accent3="accent3" accent4="accent4" accent5="accent5" accent6="accent6" hlink="hlink" folHlink="folHlink"/>
   <p:sldLayoutIdLst>
-    <p:sldLayoutId xmlns:r="http://schemas.openxmlformats.org/officeDocument/2006/relationships" id="2147483649" r:id="Rba3a2bdb25ee4cf1"/>
+    <p:sldLayoutId xmlns:r="http://schemas.openxmlformats.org/officeDocument/2006/relationships" id="2147483649" r:id="Rc6c1d9265d844fea"/>
   </p:sldLayoutIdLst>
   <p:txStyles>
     <p:titleStyle>
@@ -16685,7 +16685,7 @@
                   <a:srgbClr val="F3FBFF"/>
                 </a:solidFill>
               </a:rPr>
-              <a:t>タイトルからコースを選び、STARTへ進む</a:t>
+              <a:t>タイトルでレースかSOUND TESTを選ぶ</a:t>
             </a:r>
           </a:p>
         </p:txBody>
@@ -16772,7 +16772,7 @@
                   <a:srgbClr val="F3FBFF"/>
                 </a:solidFill>
               </a:rPr>
-              <a:t>モード選択</a:t>
+              <a:t>1P / 2P / SE</a:t>
             </a:r>
           </a:p>
         </p:txBody>
@@ -17383,7 +17383,7 @@
                   <a:srgbClr val="F3FBFF"/>
                 </a:solidFill>
               </a:rPr>
-              <a:t>上下で1P / 2Pを選択</a:t>
+              <a:t>上下で1P / 2P / SOUND TESTを選択</a:t>
             </a:r>
           </a:p>
         </p:txBody>
@@ -17522,7 +17522,7 @@
                   <a:srgbClr val="F3FBFF"/>
                 </a:solidFill>
               </a:rPr>
-              <a:t>左右でCPU LEVELを変更</a:t>
+              <a:t>1Pは左右でCPU LEVELを変更</a:t>
             </a:r>
           </a:p>
         </p:txBody>
@@ -17661,7 +17661,7 @@
                   <a:srgbClr val="F3FBFF"/>
                 </a:solidFill>
               </a:rPr>
-              <a:t>決定後、左右でコースを選択</a:t>
+              <a:t>レースはコース選択、HOW TO PLAYへ</a:t>
             </a:r>
           </a:p>
         </p:txBody>
@@ -17800,7 +17800,7 @@
                   <a:srgbClr val="F3FBFF"/>
                 </a:solidFill>
               </a:rPr>
-              <a:t>HOW TO PLAY確認後、READYへ</a:t>
+              <a:t>SOUND TESTは左右で選び、SPACEで再生</a:t>
             </a:r>
           </a:p>
         </p:txBody>
@@ -23227,7 +23227,7 @@
                   <a:srgbClr val="F3FBFF"/>
                 </a:solidFill>
               </a:rPr>
-              <a:t>勝者と両車の周回数を表示。約5秒後にタイトルへ。</a:t>
+              <a:t>勝者別ファンファーレ後、結果と周回数を約5秒表示。</a:t>
             </a:r>
           </a:p>
         </p:txBody>
@@ -23314,7 +23314,7 @@
                   <a:srgbClr val="FFD35A"/>
                 </a:solidFill>
               </a:rPr>
-              <a:t>INPUT RELEASE</a:t>
+              <a:t>COUNTDOWN + INPUT</a:t>
             </a:r>
           </a:p>
         </p:txBody>
@@ -23368,7 +23368,7 @@
                   <a:srgbClr val="F3FBFF"/>
                 </a:solidFill>
               </a:rPr>
-              <a:t>ゴール時の入力を離すまで復帰タイマーは開始しない。</a:t>
+              <a:t>3・2・1は0.75秒間隔。STARTまで操作無効、ゴール後は入力を離す。</a:t>
             </a:r>
           </a:p>
         </p:txBody>

--- a/doc/manual-ja.pptx
+++ b/doc/manual-ja.pptx
@@ -2,29 +2,29 @@
 <file path=ppt/presentation.xml><?xml version="1.0" encoding="utf-8"?>
 <p:presentation xmlns:p="http://schemas.openxmlformats.org/presentationml/2006/main">
   <p:sldMasterIdLst>
-    <p:sldMasterId xmlns:r="http://schemas.openxmlformats.org/officeDocument/2006/relationships" id="2147483648" r:id="R9be9bd9eebb3408a"/>
+    <p:sldMasterId xmlns:r="http://schemas.openxmlformats.org/officeDocument/2006/relationships" id="2147483648" r:id="R7e694c49aabe49d9"/>
   </p:sldMasterIdLst>
   <p:notesMasterIdLst>
-    <p:notesMasterId xmlns:r="http://schemas.openxmlformats.org/officeDocument/2006/relationships" r:id="R2c7dc4c2e2474ba5"/>
+    <p:notesMasterId xmlns:r="http://schemas.openxmlformats.org/officeDocument/2006/relationships" r:id="R131baa2cfdf2424d"/>
   </p:notesMasterIdLst>
   <p:sldIdLst>
-    <p:sldId xmlns:r="http://schemas.openxmlformats.org/officeDocument/2006/relationships" id="256" r:id="Rfa9e9873a31b4000"/>
-    <p:sldId xmlns:r="http://schemas.openxmlformats.org/officeDocument/2006/relationships" id="257" r:id="R79be72ca44494f48"/>
-    <p:sldId xmlns:r="http://schemas.openxmlformats.org/officeDocument/2006/relationships" id="258" r:id="R5104a2f644d24d9c"/>
-    <p:sldId xmlns:r="http://schemas.openxmlformats.org/officeDocument/2006/relationships" id="259" r:id="Ra6610c61d4b7452f"/>
-    <p:sldId xmlns:r="http://schemas.openxmlformats.org/officeDocument/2006/relationships" id="260" r:id="R0d74a54757704960"/>
-    <p:sldId xmlns:r="http://schemas.openxmlformats.org/officeDocument/2006/relationships" id="261" r:id="Re229b97342dc4b28"/>
-    <p:sldId xmlns:r="http://schemas.openxmlformats.org/officeDocument/2006/relationships" id="262" r:id="R98a300353b454ded"/>
-    <p:sldId xmlns:r="http://schemas.openxmlformats.org/officeDocument/2006/relationships" id="263" r:id="R329533e370e446da"/>
-    <p:sldId xmlns:r="http://schemas.openxmlformats.org/officeDocument/2006/relationships" id="264" r:id="Rf84095de3bcf4b77"/>
-    <p:sldId xmlns:r="http://schemas.openxmlformats.org/officeDocument/2006/relationships" id="265" r:id="Rd30cb313bf1f4b89"/>
-    <p:sldId xmlns:r="http://schemas.openxmlformats.org/officeDocument/2006/relationships" id="266" r:id="Rad5a274c94bf42d3"/>
-    <p:sldId xmlns:r="http://schemas.openxmlformats.org/officeDocument/2006/relationships" id="267" r:id="R5b391acc796c4c42"/>
-    <p:sldId xmlns:r="http://schemas.openxmlformats.org/officeDocument/2006/relationships" id="268" r:id="R96adbed455a74b8e"/>
-    <p:sldId xmlns:r="http://schemas.openxmlformats.org/officeDocument/2006/relationships" id="269" r:id="R17b8214569eb4554"/>
-    <p:sldId xmlns:r="http://schemas.openxmlformats.org/officeDocument/2006/relationships" id="270" r:id="Raa5a54ac0b854a64"/>
-    <p:sldId xmlns:r="http://schemas.openxmlformats.org/officeDocument/2006/relationships" id="271" r:id="R83b92fc4e2a24e79"/>
-    <p:sldId xmlns:r="http://schemas.openxmlformats.org/officeDocument/2006/relationships" id="272" r:id="R6c7ccf28ec1a41d1"/>
+    <p:sldId xmlns:r="http://schemas.openxmlformats.org/officeDocument/2006/relationships" id="256" r:id="R79233244a6bd43e4"/>
+    <p:sldId xmlns:r="http://schemas.openxmlformats.org/officeDocument/2006/relationships" id="257" r:id="R5106cb1e3dca46a0"/>
+    <p:sldId xmlns:r="http://schemas.openxmlformats.org/officeDocument/2006/relationships" id="258" r:id="R1393ba8b5f2a4de1"/>
+    <p:sldId xmlns:r="http://schemas.openxmlformats.org/officeDocument/2006/relationships" id="259" r:id="R25d432cd9d7f4e99"/>
+    <p:sldId xmlns:r="http://schemas.openxmlformats.org/officeDocument/2006/relationships" id="260" r:id="R3f73c4df17b546af"/>
+    <p:sldId xmlns:r="http://schemas.openxmlformats.org/officeDocument/2006/relationships" id="261" r:id="Rdfe08a08e3684ad2"/>
+    <p:sldId xmlns:r="http://schemas.openxmlformats.org/officeDocument/2006/relationships" id="262" r:id="Rb3ea875acf4d4c11"/>
+    <p:sldId xmlns:r="http://schemas.openxmlformats.org/officeDocument/2006/relationships" id="263" r:id="R8d7abdfe30094810"/>
+    <p:sldId xmlns:r="http://schemas.openxmlformats.org/officeDocument/2006/relationships" id="264" r:id="Rdad5e2d9e5e34f31"/>
+    <p:sldId xmlns:r="http://schemas.openxmlformats.org/officeDocument/2006/relationships" id="265" r:id="Rfa59f03addf5460b"/>
+    <p:sldId xmlns:r="http://schemas.openxmlformats.org/officeDocument/2006/relationships" id="266" r:id="Ra2100cece6214fcb"/>
+    <p:sldId xmlns:r="http://schemas.openxmlformats.org/officeDocument/2006/relationships" id="267" r:id="Rf49c706b7dd44656"/>
+    <p:sldId xmlns:r="http://schemas.openxmlformats.org/officeDocument/2006/relationships" id="268" r:id="Rac988b75c0bb45de"/>
+    <p:sldId xmlns:r="http://schemas.openxmlformats.org/officeDocument/2006/relationships" id="269" r:id="Re6c0f6d76d2745c1"/>
+    <p:sldId xmlns:r="http://schemas.openxmlformats.org/officeDocument/2006/relationships" id="270" r:id="Ree5f77ccc6f747b7"/>
+    <p:sldId xmlns:r="http://schemas.openxmlformats.org/officeDocument/2006/relationships" id="271" r:id="R7a6317a5c6534d35"/>
+    <p:sldId xmlns:r="http://schemas.openxmlformats.org/officeDocument/2006/relationships" id="272" r:id="R1e626e97a26a4bd2"/>
   </p:sldIdLst>
   <p:sldSz cx="11430000" cy="8572500"/>
   <p:notesSz cx="6858000" cy="9144000"/>
@@ -1578,7 +1578,7 @@
   </p:cSld>
   <p:clrMap bg1="lt1" tx1="dk1" bg2="lt2" tx2="dk2" accent1="accent1" accent2="accent2" accent3="accent3" accent4="accent4" accent5="accent5" accent6="accent6" hlink="hlink" folHlink="folHlink"/>
   <p:sldLayoutIdLst>
-    <p:sldLayoutId xmlns:r="http://schemas.openxmlformats.org/officeDocument/2006/relationships" id="2147483649" r:id="Rc6c1d9265d844fea"/>
+    <p:sldLayoutId xmlns:r="http://schemas.openxmlformats.org/officeDocument/2006/relationships" id="2147483649" r:id="R3b88d63b0d5e4aac"/>
   </p:sldLayoutIdLst>
   <p:txStyles>
     <p:titleStyle>
@@ -16772,7 +16772,7 @@
                   <a:srgbClr val="F3FBFF"/>
                 </a:solidFill>
               </a:rPr>
-              <a:t>1P / 2P / SE</a:t>
+              <a:t>1P / 2P / SOUND</a:t>
             </a:r>
           </a:p>
         </p:txBody>
@@ -17800,7 +17800,7 @@
                   <a:srgbClr val="F3FBFF"/>
                 </a:solidFill>
               </a:rPr>
-              <a:t>SOUND TESTは左右で選び、SPACEで再生</a:t>
+              <a:t>SOUND TEST: 上下でBGM/SE、左右で選択、SPACEで再生</a:t>
             </a:r>
           </a:p>
         </p:txBody>
@@ -18858,7 +18858,7 @@
                   <a:srgbClr val="F4F7FA"/>
                 </a:solidFill>
               </a:rPr>
-              <a:t>LEFT / RIGHT  コース変更     SPACE / BUTTON 1  決定     ESC  タイトル</a:t>
+              <a:t>LEFT / RIGHT  コース変更     SPACE / BUTTON 1  決定     ESC / B2  タイトル</a:t>
             </a:r>
           </a:p>
         </p:txBody>
@@ -20885,7 +20885,7 @@
                   <a:srgbClr val="FFD35A"/>
                 </a:solidFill>
               </a:rPr>
-              <a:t>ESC</a:t>
+              <a:t>ESC / B2</a:t>
             </a:r>
           </a:p>
         </p:txBody>
@@ -23227,7 +23227,7 @@
                   <a:srgbClr val="F3FBFF"/>
                 </a:solidFill>
               </a:rPr>
-              <a:t>勝者別ファンファーレ後、結果と周回数を約5秒表示。</a:t>
+              <a:t>入力を離し、PRESS ANY KEYでTITLEへ戻る。自動では戻らない。</a:t>
             </a:r>
           </a:p>
         </p:txBody>
@@ -23368,7 +23368,7 @@
                   <a:srgbClr val="F3FBFF"/>
                 </a:solidFill>
               </a:rPr>
-              <a:t>3・2・1は0.75秒間隔。STARTまで操作無効、ゴール後は入力を離す。</a:t>
+              <a:t>3・2・1は0.75秒間隔。STARTで操作解禁。FINAL LAPはBGM切替。</a:t>
             </a:r>
           </a:p>
         </p:txBody>
@@ -23455,7 +23455,7 @@
                   <a:srgbClr val="648BFF"/>
                 </a:solidFill>
               </a:rPr>
-              <a:t>ESC</a:t>
+              <a:t>ESC / B2</a:t>
             </a:r>
           </a:p>
         </p:txBody>
